--- a/docs/collateral/seminar-luggage/out/BondEx_Seminar_TypeOnly.pptx
+++ b/docs/collateral/seminar-luggage/out/BondEx_Seminar_TypeOnly.pptx
@@ -863,7 +863,7 @@
           <a:lstStyle/>
           <a:p>
             <a:r>
-              <a:t>［2分］チェックアウトが荷物を手放す自然な接点であることを示し、BondExの現在の取り組みを30秒で紹介する。</a:t>
+              <a:t>［2分］チェックアウトが荷物を手放す自然な接点であることを示し、図を使ってBondExの役割（既存の物流を旅の動線につなぐ）を30秒で紹介する。</a:t>
             </a:r>
           </a:p>
           <a:p/>
@@ -889,7 +889,12 @@
           </a:p>
           <a:p>
             <a:r>
-              <a:t>私たちBondExは、まさにここから始めています。ホテルからホテルへの、スーツケース配送です。旅行会社やDMCの皆さんからご依頼をいただいて、既存の物流ネットワークを使って配送を手配しています。新しく配送網を作っているのではなく、今ある物流を、旅の動線に合わせてつないでいる。それが私たちの役割です。</a:t>
+              <a:t>私たちBondExは、まさにここから始めています。ホテルからホテルへの、スーツケース配送です。</a:t>
+            </a:r>
+          </a:p>
+          <a:p>
+            <a:r>
+              <a:t>（図の左の点を指して）チェックアウトのときに、ホテルで荷物を預ける。人は上の点線のように、身軽に観光へ。荷物は下のオレンジの線、今ある物流で、次のホテルへ先回りします。（右の点を指して）夕方、次のホテルに着くと、荷物はもう届いている。旅行会社やDMCの皆さんからご依頼をいただいて、既存の物流ネットワークを使って配送を手配しています。新しく配送網を作っているのではなく、今ある物流を、旅の動線に合わせてつないでいる。それが私たちの役割です。</a:t>
             </a:r>
           </a:p>
           <a:p>
@@ -4720,14 +4725,631 @@
       <p:grpSpPr/>
       <p:sp>
         <p:nvSpPr>
-          <p:cNvPr id="2" name="見出し"/>
+          <p:cNvPr id="2" name="図・線1"/>
+          <p:cNvSpPr/>
+          <p:nvPr/>
+        </p:nvSpPr>
+        <p:spPr>
+          <a:xfrm>
+            <a:off x="2540000" y="4381500"/>
+            <a:ext cx="1016000" cy="0"/>
+          </a:xfrm>
+          <a:custGeom>
+            <a:avLst/>
+            <a:gdLst/>
+            <a:ahLst/>
+            <a:cxnLst/>
+            <a:rect l="l" t="t" r="r" b="b"/>
+            <a:pathLst>
+              <a:path w="1016000" h="0">
+                <a:moveTo>
+                  <a:pt x="0" y="0"/>
+                </a:moveTo>
+                <a:lnTo>
+                  <a:pt x="1016000" y="0"/>
+                </a:lnTo>
+              </a:path>
+            </a:pathLst>
+          </a:custGeom>
+          <a:noFill/>
+          <a:ln w="38100" cap="rnd">
+            <a:solidFill>
+              <a:srgbClr val="FFFFFF"/>
+            </a:solidFill>
+            <a:round/>
+          </a:ln>
+        </p:spPr>
+        <p:txBody>
+          <a:bodyPr rtlCol="0" anchor="ctr"/>
+          <a:lstStyle/>
+          <a:p>
+            <a:pPr algn="ctr"/>
+          </a:p>
+        </p:txBody>
+      </p:sp>
+      <p:sp>
+        <p:nvSpPr>
+          <p:cNvPr id="3" name="図・線2"/>
+          <p:cNvSpPr/>
+          <p:nvPr/>
+        </p:nvSpPr>
+        <p:spPr>
+          <a:xfrm>
+            <a:off x="3556000" y="3587750"/>
+            <a:ext cx="5080000" cy="793750"/>
+          </a:xfrm>
+          <a:custGeom>
+            <a:avLst/>
+            <a:gdLst/>
+            <a:ahLst/>
+            <a:cxnLst/>
+            <a:rect l="l" t="t" r="r" b="b"/>
+            <a:pathLst>
+              <a:path w="5080000" h="793750">
+                <a:moveTo>
+                  <a:pt x="0" y="793750"/>
+                </a:moveTo>
+                <a:lnTo>
+                  <a:pt x="79375" y="744916"/>
+                </a:lnTo>
+                <a:lnTo>
+                  <a:pt x="158750" y="697632"/>
+                </a:lnTo>
+                <a:lnTo>
+                  <a:pt x="238125" y="651898"/>
+                </a:lnTo>
+                <a:lnTo>
+                  <a:pt x="317500" y="607715"/>
+                </a:lnTo>
+                <a:lnTo>
+                  <a:pt x="396875" y="565082"/>
+                </a:lnTo>
+                <a:lnTo>
+                  <a:pt x="476250" y="523999"/>
+                </a:lnTo>
+                <a:lnTo>
+                  <a:pt x="555625" y="484467"/>
+                </a:lnTo>
+                <a:lnTo>
+                  <a:pt x="635000" y="446484"/>
+                </a:lnTo>
+                <a:lnTo>
+                  <a:pt x="714375" y="410052"/>
+                </a:lnTo>
+                <a:lnTo>
+                  <a:pt x="793750" y="375171"/>
+                </a:lnTo>
+                <a:lnTo>
+                  <a:pt x="873125" y="341840"/>
+                </a:lnTo>
+                <a:lnTo>
+                  <a:pt x="952500" y="310059"/>
+                </a:lnTo>
+                <a:lnTo>
+                  <a:pt x="1031875" y="279828"/>
+                </a:lnTo>
+                <a:lnTo>
+                  <a:pt x="1111250" y="251147"/>
+                </a:lnTo>
+                <a:lnTo>
+                  <a:pt x="1190625" y="224017"/>
+                </a:lnTo>
+                <a:lnTo>
+                  <a:pt x="1270000" y="198438"/>
+                </a:lnTo>
+                <a:lnTo>
+                  <a:pt x="1349375" y="174408"/>
+                </a:lnTo>
+                <a:lnTo>
+                  <a:pt x="1428750" y="151929"/>
+                </a:lnTo>
+                <a:lnTo>
+                  <a:pt x="1508125" y="131000"/>
+                </a:lnTo>
+                <a:lnTo>
+                  <a:pt x="1587500" y="111621"/>
+                </a:lnTo>
+                <a:lnTo>
+                  <a:pt x="1666875" y="93793"/>
+                </a:lnTo>
+                <a:lnTo>
+                  <a:pt x="1746250" y="77515"/>
+                </a:lnTo>
+                <a:lnTo>
+                  <a:pt x="1825625" y="62787"/>
+                </a:lnTo>
+                <a:lnTo>
+                  <a:pt x="1905000" y="49609"/>
+                </a:lnTo>
+                <a:lnTo>
+                  <a:pt x="1984375" y="37982"/>
+                </a:lnTo>
+                <a:lnTo>
+                  <a:pt x="2063750" y="27905"/>
+                </a:lnTo>
+                <a:lnTo>
+                  <a:pt x="2143125" y="19379"/>
+                </a:lnTo>
+                <a:lnTo>
+                  <a:pt x="2222500" y="12402"/>
+                </a:lnTo>
+                <a:lnTo>
+                  <a:pt x="2301875" y="6976"/>
+                </a:lnTo>
+                <a:lnTo>
+                  <a:pt x="2381250" y="3101"/>
+                </a:lnTo>
+                <a:lnTo>
+                  <a:pt x="2460625" y="775"/>
+                </a:lnTo>
+                <a:lnTo>
+                  <a:pt x="2540000" y="0"/>
+                </a:lnTo>
+                <a:lnTo>
+                  <a:pt x="2619375" y="775"/>
+                </a:lnTo>
+                <a:lnTo>
+                  <a:pt x="2698750" y="3101"/>
+                </a:lnTo>
+                <a:lnTo>
+                  <a:pt x="2778125" y="6976"/>
+                </a:lnTo>
+                <a:lnTo>
+                  <a:pt x="2857500" y="12402"/>
+                </a:lnTo>
+                <a:lnTo>
+                  <a:pt x="2936875" y="19379"/>
+                </a:lnTo>
+                <a:lnTo>
+                  <a:pt x="3016250" y="27905"/>
+                </a:lnTo>
+                <a:lnTo>
+                  <a:pt x="3095625" y="37982"/>
+                </a:lnTo>
+                <a:lnTo>
+                  <a:pt x="3175000" y="49609"/>
+                </a:lnTo>
+                <a:lnTo>
+                  <a:pt x="3254375" y="62787"/>
+                </a:lnTo>
+                <a:lnTo>
+                  <a:pt x="3333750" y="77515"/>
+                </a:lnTo>
+                <a:lnTo>
+                  <a:pt x="3413125" y="93793"/>
+                </a:lnTo>
+                <a:lnTo>
+                  <a:pt x="3492500" y="111621"/>
+                </a:lnTo>
+                <a:lnTo>
+                  <a:pt x="3571875" y="131000"/>
+                </a:lnTo>
+                <a:lnTo>
+                  <a:pt x="3651250" y="151929"/>
+                </a:lnTo>
+                <a:lnTo>
+                  <a:pt x="3730625" y="174408"/>
+                </a:lnTo>
+                <a:lnTo>
+                  <a:pt x="3810000" y="198438"/>
+                </a:lnTo>
+                <a:lnTo>
+                  <a:pt x="3889375" y="224017"/>
+                </a:lnTo>
+                <a:lnTo>
+                  <a:pt x="3968750" y="251147"/>
+                </a:lnTo>
+                <a:lnTo>
+                  <a:pt x="4048125" y="279828"/>
+                </a:lnTo>
+                <a:lnTo>
+                  <a:pt x="4127500" y="310059"/>
+                </a:lnTo>
+                <a:lnTo>
+                  <a:pt x="4206875" y="341840"/>
+                </a:lnTo>
+                <a:lnTo>
+                  <a:pt x="4286250" y="375171"/>
+                </a:lnTo>
+                <a:lnTo>
+                  <a:pt x="4365625" y="410052"/>
+                </a:lnTo>
+                <a:lnTo>
+                  <a:pt x="4445000" y="446484"/>
+                </a:lnTo>
+                <a:lnTo>
+                  <a:pt x="4524375" y="484467"/>
+                </a:lnTo>
+                <a:lnTo>
+                  <a:pt x="4603750" y="523999"/>
+                </a:lnTo>
+                <a:lnTo>
+                  <a:pt x="4683125" y="565082"/>
+                </a:lnTo>
+                <a:lnTo>
+                  <a:pt x="4762500" y="607715"/>
+                </a:lnTo>
+                <a:lnTo>
+                  <a:pt x="4841875" y="651898"/>
+                </a:lnTo>
+                <a:lnTo>
+                  <a:pt x="4921250" y="697632"/>
+                </a:lnTo>
+                <a:lnTo>
+                  <a:pt x="5000625" y="744916"/>
+                </a:lnTo>
+                <a:lnTo>
+                  <a:pt x="5080000" y="793750"/>
+                </a:lnTo>
+              </a:path>
+            </a:pathLst>
+          </a:custGeom>
+          <a:noFill/>
+          <a:ln w="31750" cap="rnd">
+            <a:solidFill>
+              <a:srgbClr val="FFFFFF">
+                <a:alpha val="85000"/>
+              </a:srgbClr>
+            </a:solidFill>
+            <a:custDash>
+              <a:ds d="20000" sp="320000"/>
+            </a:custDash>
+            <a:round/>
+          </a:ln>
+        </p:spPr>
+        <p:txBody>
+          <a:bodyPr rtlCol="0" anchor="ctr"/>
+          <a:lstStyle/>
+          <a:p>
+            <a:pPr algn="ctr"/>
+          </a:p>
+        </p:txBody>
+      </p:sp>
+      <p:sp>
+        <p:nvSpPr>
+          <p:cNvPr id="4" name="図・線3"/>
+          <p:cNvSpPr/>
+          <p:nvPr/>
+        </p:nvSpPr>
+        <p:spPr>
+          <a:xfrm>
+            <a:off x="3556000" y="4381500"/>
+            <a:ext cx="5080000" cy="793750"/>
+          </a:xfrm>
+          <a:custGeom>
+            <a:avLst/>
+            <a:gdLst/>
+            <a:ahLst/>
+            <a:cxnLst/>
+            <a:rect l="l" t="t" r="r" b="b"/>
+            <a:pathLst>
+              <a:path w="5080000" h="793750">
+                <a:moveTo>
+                  <a:pt x="0" y="0"/>
+                </a:moveTo>
+                <a:lnTo>
+                  <a:pt x="79375" y="48834"/>
+                </a:lnTo>
+                <a:lnTo>
+                  <a:pt x="158750" y="96118"/>
+                </a:lnTo>
+                <a:lnTo>
+                  <a:pt x="238125" y="141852"/>
+                </a:lnTo>
+                <a:lnTo>
+                  <a:pt x="317500" y="186035"/>
+                </a:lnTo>
+                <a:lnTo>
+                  <a:pt x="396875" y="228668"/>
+                </a:lnTo>
+                <a:lnTo>
+                  <a:pt x="476250" y="269751"/>
+                </a:lnTo>
+                <a:lnTo>
+                  <a:pt x="555625" y="309283"/>
+                </a:lnTo>
+                <a:lnTo>
+                  <a:pt x="635000" y="347266"/>
+                </a:lnTo>
+                <a:lnTo>
+                  <a:pt x="714375" y="383698"/>
+                </a:lnTo>
+                <a:lnTo>
+                  <a:pt x="793750" y="418579"/>
+                </a:lnTo>
+                <a:lnTo>
+                  <a:pt x="873125" y="451910"/>
+                </a:lnTo>
+                <a:lnTo>
+                  <a:pt x="952500" y="483691"/>
+                </a:lnTo>
+                <a:lnTo>
+                  <a:pt x="1031875" y="513922"/>
+                </a:lnTo>
+                <a:lnTo>
+                  <a:pt x="1111250" y="542603"/>
+                </a:lnTo>
+                <a:lnTo>
+                  <a:pt x="1190625" y="569733"/>
+                </a:lnTo>
+                <a:lnTo>
+                  <a:pt x="1270000" y="595312"/>
+                </a:lnTo>
+                <a:lnTo>
+                  <a:pt x="1349375" y="619342"/>
+                </a:lnTo>
+                <a:lnTo>
+                  <a:pt x="1428750" y="641821"/>
+                </a:lnTo>
+                <a:lnTo>
+                  <a:pt x="1508125" y="662750"/>
+                </a:lnTo>
+                <a:lnTo>
+                  <a:pt x="1587500" y="682129"/>
+                </a:lnTo>
+                <a:lnTo>
+                  <a:pt x="1666875" y="699957"/>
+                </a:lnTo>
+                <a:lnTo>
+                  <a:pt x="1746250" y="716235"/>
+                </a:lnTo>
+                <a:lnTo>
+                  <a:pt x="1825625" y="730963"/>
+                </a:lnTo>
+                <a:lnTo>
+                  <a:pt x="1905000" y="744141"/>
+                </a:lnTo>
+                <a:lnTo>
+                  <a:pt x="1984375" y="755768"/>
+                </a:lnTo>
+                <a:lnTo>
+                  <a:pt x="2063750" y="765845"/>
+                </a:lnTo>
+                <a:lnTo>
+                  <a:pt x="2143125" y="774371"/>
+                </a:lnTo>
+                <a:lnTo>
+                  <a:pt x="2222500" y="781348"/>
+                </a:lnTo>
+                <a:lnTo>
+                  <a:pt x="2301875" y="786774"/>
+                </a:lnTo>
+                <a:lnTo>
+                  <a:pt x="2381250" y="790649"/>
+                </a:lnTo>
+                <a:lnTo>
+                  <a:pt x="2460625" y="792975"/>
+                </a:lnTo>
+                <a:lnTo>
+                  <a:pt x="2540000" y="793750"/>
+                </a:lnTo>
+                <a:lnTo>
+                  <a:pt x="2619375" y="792975"/>
+                </a:lnTo>
+                <a:lnTo>
+                  <a:pt x="2698750" y="790649"/>
+                </a:lnTo>
+                <a:lnTo>
+                  <a:pt x="2778125" y="786774"/>
+                </a:lnTo>
+                <a:lnTo>
+                  <a:pt x="2857500" y="781348"/>
+                </a:lnTo>
+                <a:lnTo>
+                  <a:pt x="2936875" y="774371"/>
+                </a:lnTo>
+                <a:lnTo>
+                  <a:pt x="3016250" y="765845"/>
+                </a:lnTo>
+                <a:lnTo>
+                  <a:pt x="3095625" y="755768"/>
+                </a:lnTo>
+                <a:lnTo>
+                  <a:pt x="3175000" y="744141"/>
+                </a:lnTo>
+                <a:lnTo>
+                  <a:pt x="3254375" y="730963"/>
+                </a:lnTo>
+                <a:lnTo>
+                  <a:pt x="3333750" y="716235"/>
+                </a:lnTo>
+                <a:lnTo>
+                  <a:pt x="3413125" y="699957"/>
+                </a:lnTo>
+                <a:lnTo>
+                  <a:pt x="3492500" y="682129"/>
+                </a:lnTo>
+                <a:lnTo>
+                  <a:pt x="3571875" y="662750"/>
+                </a:lnTo>
+                <a:lnTo>
+                  <a:pt x="3651250" y="641821"/>
+                </a:lnTo>
+                <a:lnTo>
+                  <a:pt x="3730625" y="619342"/>
+                </a:lnTo>
+                <a:lnTo>
+                  <a:pt x="3810000" y="595312"/>
+                </a:lnTo>
+                <a:lnTo>
+                  <a:pt x="3889375" y="569733"/>
+                </a:lnTo>
+                <a:lnTo>
+                  <a:pt x="3968750" y="542603"/>
+                </a:lnTo>
+                <a:lnTo>
+                  <a:pt x="4048125" y="513922"/>
+                </a:lnTo>
+                <a:lnTo>
+                  <a:pt x="4127500" y="483691"/>
+                </a:lnTo>
+                <a:lnTo>
+                  <a:pt x="4206875" y="451910"/>
+                </a:lnTo>
+                <a:lnTo>
+                  <a:pt x="4286250" y="418579"/>
+                </a:lnTo>
+                <a:lnTo>
+                  <a:pt x="4365625" y="383698"/>
+                </a:lnTo>
+                <a:lnTo>
+                  <a:pt x="4445000" y="347266"/>
+                </a:lnTo>
+                <a:lnTo>
+                  <a:pt x="4524375" y="309283"/>
+                </a:lnTo>
+                <a:lnTo>
+                  <a:pt x="4603750" y="269751"/>
+                </a:lnTo>
+                <a:lnTo>
+                  <a:pt x="4683125" y="228668"/>
+                </a:lnTo>
+                <a:lnTo>
+                  <a:pt x="4762500" y="186035"/>
+                </a:lnTo>
+                <a:lnTo>
+                  <a:pt x="4841875" y="141852"/>
+                </a:lnTo>
+                <a:lnTo>
+                  <a:pt x="4921250" y="96118"/>
+                </a:lnTo>
+                <a:lnTo>
+                  <a:pt x="5000625" y="48834"/>
+                </a:lnTo>
+                <a:lnTo>
+                  <a:pt x="5080000" y="0"/>
+                </a:lnTo>
+              </a:path>
+            </a:pathLst>
+          </a:custGeom>
+          <a:noFill/>
+          <a:ln w="50800" cap="rnd">
+            <a:solidFill>
+              <a:srgbClr val="F26A1B"/>
+            </a:solidFill>
+            <a:round/>
+          </a:ln>
+        </p:spPr>
+        <p:txBody>
+          <a:bodyPr rtlCol="0" anchor="ctr"/>
+          <a:lstStyle/>
+          <a:p>
+            <a:pPr algn="ctr"/>
+          </a:p>
+        </p:txBody>
+      </p:sp>
+      <p:sp>
+        <p:nvSpPr>
+          <p:cNvPr id="5" name="図・線4"/>
+          <p:cNvSpPr/>
+          <p:nvPr/>
+        </p:nvSpPr>
+        <p:spPr>
+          <a:xfrm>
+            <a:off x="8636000" y="4381500"/>
+            <a:ext cx="1016000" cy="0"/>
+          </a:xfrm>
+          <a:custGeom>
+            <a:avLst/>
+            <a:gdLst/>
+            <a:ahLst/>
+            <a:cxnLst/>
+            <a:rect l="l" t="t" r="r" b="b"/>
+            <a:pathLst>
+              <a:path w="1016000" h="0">
+                <a:moveTo>
+                  <a:pt x="0" y="0"/>
+                </a:moveTo>
+                <a:lnTo>
+                  <a:pt x="1016000" y="0"/>
+                </a:lnTo>
+              </a:path>
+            </a:pathLst>
+          </a:custGeom>
+          <a:noFill/>
+          <a:ln w="38100" cap="rnd">
+            <a:solidFill>
+              <a:srgbClr val="FFFFFF"/>
+            </a:solidFill>
+            <a:round/>
+          </a:ln>
+        </p:spPr>
+        <p:txBody>
+          <a:bodyPr rtlCol="0" anchor="ctr"/>
+          <a:lstStyle/>
+          <a:p>
+            <a:pPr algn="ctr"/>
+          </a:p>
+        </p:txBody>
+      </p:sp>
+      <p:sp>
+        <p:nvSpPr>
+          <p:cNvPr id="6" name="図・点"/>
+          <p:cNvSpPr/>
+          <p:nvPr/>
+        </p:nvSpPr>
+        <p:spPr>
+          <a:xfrm>
+            <a:off x="2432050" y="4273550"/>
+            <a:ext cx="215900" cy="215900"/>
+          </a:xfrm>
+          <a:prstGeom prst="ellipse">
+            <a:avLst/>
+          </a:prstGeom>
+          <a:solidFill>
+            <a:srgbClr val="FFFFFF"/>
+          </a:solidFill>
+          <a:ln>
+            <a:noFill/>
+          </a:ln>
+        </p:spPr>
+        <p:txBody>
+          <a:bodyPr rtlCol="0" anchor="ctr"/>
+          <a:lstStyle/>
+          <a:p>
+            <a:pPr algn="ctr"/>
+          </a:p>
+        </p:txBody>
+      </p:sp>
+      <p:sp>
+        <p:nvSpPr>
+          <p:cNvPr id="7" name="図・点"/>
+          <p:cNvSpPr/>
+          <p:nvPr/>
+        </p:nvSpPr>
+        <p:spPr>
+          <a:xfrm>
+            <a:off x="9544050" y="4273550"/>
+            <a:ext cx="215900" cy="215900"/>
+          </a:xfrm>
+          <a:prstGeom prst="ellipse">
+            <a:avLst/>
+          </a:prstGeom>
+          <a:solidFill>
+            <a:srgbClr val="FFFFFF"/>
+          </a:solidFill>
+          <a:ln>
+            <a:noFill/>
+          </a:ln>
+        </p:spPr>
+        <p:txBody>
+          <a:bodyPr rtlCol="0" anchor="ctr"/>
+          <a:lstStyle/>
+          <a:p>
+            <a:pPr algn="ctr"/>
+          </a:p>
+        </p:txBody>
+      </p:sp>
+      <p:sp>
+        <p:nvSpPr>
+          <p:cNvPr id="8" name="図・ラベル"/>
           <p:cNvSpPr txBox="1"/>
           <p:nvPr/>
         </p:nvSpPr>
         <p:spPr>
           <a:xfrm>
-            <a:off x="812800" y="2346008"/>
-            <a:ext cx="8036620" cy="2055812"/>
+            <a:off x="-3175000" y="3634740"/>
+            <a:ext cx="11430000" cy="432816"/>
           </a:xfrm>
           <a:prstGeom prst="rect">
             <a:avLst/>
@@ -4738,9 +5360,9 @@
           <a:bodyPr wrap="none" lIns="0" rIns="0" tIns="0" bIns="0" anchor="t"/>
           <a:lstStyle/>
           <a:p>
-            <a:pPr algn="l">
+            <a:pPr algn="ctr">
               <a:lnSpc>
-                <a:spcPts val="8093"/>
+                <a:spcPts val="3408"/>
               </a:lnSpc>
               <a:spcBef>
                 <a:spcPts val="0"/>
@@ -4750,7 +5372,322 @@
               </a:spcAft>
             </a:pPr>
             <a:r>
-              <a:rPr sz="5699" b="0" spc="-57" lang="ja-JP" altLang="en-US">
+              <a:rPr sz="2400" b="0" spc="-24" lang="ja-JP" altLang="en-US">
+                <a:solidFill>
+                  <a:srgbClr val="FFFFFF"/>
+                </a:solidFill>
+                <a:latin typeface="Noto Sans JP Medium"/>
+                <a:ea typeface="Noto Sans JP Medium"/>
+                <a:cs typeface="Noto Sans JP Medium"/>
+              </a:rPr>
+              <a:t>ホテル</a:t>
+            </a:r>
+          </a:p>
+        </p:txBody>
+      </p:sp>
+      <p:sp>
+        <p:nvSpPr>
+          <p:cNvPr id="9" name="図・ラベル"/>
+          <p:cNvSpPr txBox="1"/>
+          <p:nvPr/>
+        </p:nvSpPr>
+        <p:spPr>
+          <a:xfrm>
+            <a:off x="-3175000" y="4583112"/>
+            <a:ext cx="11430000" cy="270510"/>
+          </a:xfrm>
+          <a:prstGeom prst="rect">
+            <a:avLst/>
+          </a:prstGeom>
+          <a:noFill/>
+        </p:spPr>
+        <p:txBody>
+          <a:bodyPr wrap="none" lIns="0" rIns="0" tIns="0" bIns="0" anchor="t"/>
+          <a:lstStyle/>
+          <a:p>
+            <a:pPr algn="ctr">
+              <a:lnSpc>
+                <a:spcPts val="2129"/>
+              </a:lnSpc>
+              <a:spcBef>
+                <a:spcPts val="0"/>
+              </a:spcBef>
+              <a:spcAft>
+                <a:spcPts val="0"/>
+              </a:spcAft>
+            </a:pPr>
+            <a:r>
+              <a:rPr sz="1500" b="0" spc="-15" lang="ja-JP" altLang="en-US">
+                <a:solidFill>
+                  <a:srgbClr val="A3A3A3"/>
+                </a:solidFill>
+                <a:latin typeface="Noto Sans JP"/>
+                <a:ea typeface="Noto Sans JP"/>
+                <a:cs typeface="Noto Sans JP"/>
+              </a:rPr>
+              <a:t>チェックアウトで預ける</a:t>
+            </a:r>
+          </a:p>
+        </p:txBody>
+      </p:sp>
+      <p:sp>
+        <p:nvSpPr>
+          <p:cNvPr id="10" name="図・ラベル"/>
+          <p:cNvSpPr txBox="1"/>
+          <p:nvPr/>
+        </p:nvSpPr>
+        <p:spPr>
+          <a:xfrm>
+            <a:off x="3937000" y="3634740"/>
+            <a:ext cx="11430000" cy="432816"/>
+          </a:xfrm>
+          <a:prstGeom prst="rect">
+            <a:avLst/>
+          </a:prstGeom>
+          <a:noFill/>
+        </p:spPr>
+        <p:txBody>
+          <a:bodyPr wrap="none" lIns="0" rIns="0" tIns="0" bIns="0" anchor="t"/>
+          <a:lstStyle/>
+          <a:p>
+            <a:pPr algn="ctr">
+              <a:lnSpc>
+                <a:spcPts val="3408"/>
+              </a:lnSpc>
+              <a:spcBef>
+                <a:spcPts val="0"/>
+              </a:spcBef>
+              <a:spcAft>
+                <a:spcPts val="0"/>
+              </a:spcAft>
+            </a:pPr>
+            <a:r>
+              <a:rPr sz="2400" b="0" spc="-24" lang="ja-JP" altLang="en-US">
+                <a:solidFill>
+                  <a:srgbClr val="FFFFFF"/>
+                </a:solidFill>
+                <a:latin typeface="Noto Sans JP Medium"/>
+                <a:ea typeface="Noto Sans JP Medium"/>
+                <a:cs typeface="Noto Sans JP Medium"/>
+              </a:rPr>
+              <a:t>次のホテル</a:t>
+            </a:r>
+          </a:p>
+        </p:txBody>
+      </p:sp>
+      <p:sp>
+        <p:nvSpPr>
+          <p:cNvPr id="11" name="図・ラベル"/>
+          <p:cNvSpPr txBox="1"/>
+          <p:nvPr/>
+        </p:nvSpPr>
+        <p:spPr>
+          <a:xfrm>
+            <a:off x="3937000" y="4583112"/>
+            <a:ext cx="11430000" cy="270510"/>
+          </a:xfrm>
+          <a:prstGeom prst="rect">
+            <a:avLst/>
+          </a:prstGeom>
+          <a:noFill/>
+        </p:spPr>
+        <p:txBody>
+          <a:bodyPr wrap="none" lIns="0" rIns="0" tIns="0" bIns="0" anchor="t"/>
+          <a:lstStyle/>
+          <a:p>
+            <a:pPr algn="ctr">
+              <a:lnSpc>
+                <a:spcPts val="2129"/>
+              </a:lnSpc>
+              <a:spcBef>
+                <a:spcPts val="0"/>
+              </a:spcBef>
+              <a:spcAft>
+                <a:spcPts val="0"/>
+              </a:spcAft>
+            </a:pPr>
+            <a:r>
+              <a:rPr sz="1500" b="0" spc="-15" lang="ja-JP" altLang="en-US">
+                <a:solidFill>
+                  <a:srgbClr val="A3A3A3"/>
+                </a:solidFill>
+                <a:latin typeface="Noto Sans JP"/>
+                <a:ea typeface="Noto Sans JP"/>
+                <a:cs typeface="Noto Sans JP"/>
+              </a:rPr>
+              <a:t>先に届いている</a:t>
+            </a:r>
+          </a:p>
+        </p:txBody>
+      </p:sp>
+      <p:sp>
+        <p:nvSpPr>
+          <p:cNvPr id="12" name="図・ラベル"/>
+          <p:cNvSpPr txBox="1"/>
+          <p:nvPr/>
+        </p:nvSpPr>
+        <p:spPr>
+          <a:xfrm>
+            <a:off x="381000" y="3047048"/>
+            <a:ext cx="11430000" cy="378714"/>
+          </a:xfrm>
+          <a:prstGeom prst="rect">
+            <a:avLst/>
+          </a:prstGeom>
+          <a:noFill/>
+        </p:spPr>
+        <p:txBody>
+          <a:bodyPr wrap="none" lIns="0" rIns="0" tIns="0" bIns="0" anchor="t"/>
+          <a:lstStyle/>
+          <a:p>
+            <a:pPr algn="ctr">
+              <a:lnSpc>
+                <a:spcPts val="2982"/>
+              </a:lnSpc>
+              <a:spcBef>
+                <a:spcPts val="0"/>
+              </a:spcBef>
+              <a:spcAft>
+                <a:spcPts val="0"/>
+              </a:spcAft>
+            </a:pPr>
+            <a:r>
+              <a:rPr sz="2100" b="0" spc="-21" lang="ja-JP" altLang="en-US">
+                <a:solidFill>
+                  <a:srgbClr val="FFFFFF"/>
+                </a:solidFill>
+                <a:latin typeface="Noto Sans JP Medium"/>
+                <a:ea typeface="Noto Sans JP Medium"/>
+                <a:cs typeface="Noto Sans JP Medium"/>
+              </a:rPr>
+              <a:t>人は、身軽に観光へ。</a:t>
+            </a:r>
+          </a:p>
+        </p:txBody>
+      </p:sp>
+      <p:sp>
+        <p:nvSpPr>
+          <p:cNvPr id="13" name="図・ラベル"/>
+          <p:cNvSpPr txBox="1"/>
+          <p:nvPr/>
+        </p:nvSpPr>
+        <p:spPr>
+          <a:xfrm>
+            <a:off x="381000" y="5326698"/>
+            <a:ext cx="11430000" cy="378714"/>
+          </a:xfrm>
+          <a:prstGeom prst="rect">
+            <a:avLst/>
+          </a:prstGeom>
+          <a:noFill/>
+        </p:spPr>
+        <p:txBody>
+          <a:bodyPr wrap="none" lIns="0" rIns="0" tIns="0" bIns="0" anchor="t"/>
+          <a:lstStyle/>
+          <a:p>
+            <a:pPr algn="ctr">
+              <a:lnSpc>
+                <a:spcPts val="2982"/>
+              </a:lnSpc>
+              <a:spcBef>
+                <a:spcPts val="0"/>
+              </a:spcBef>
+              <a:spcAft>
+                <a:spcPts val="0"/>
+              </a:spcAft>
+            </a:pPr>
+            <a:r>
+              <a:rPr sz="2100" b="0" spc="-21" lang="ja-JP" altLang="en-US">
+                <a:solidFill>
+                  <a:srgbClr val="F26A1B"/>
+                </a:solidFill>
+                <a:latin typeface="Noto Sans JP Medium"/>
+                <a:ea typeface="Noto Sans JP Medium"/>
+                <a:cs typeface="Noto Sans JP Medium"/>
+              </a:rPr>
+              <a:t>荷物は、今ある物流で。</a:t>
+            </a:r>
+          </a:p>
+        </p:txBody>
+      </p:sp>
+      <p:sp>
+        <p:nvSpPr>
+          <p:cNvPr id="14" name="図・ラベル"/>
+          <p:cNvSpPr txBox="1"/>
+          <p:nvPr/>
+        </p:nvSpPr>
+        <p:spPr>
+          <a:xfrm>
+            <a:off x="381000" y="5776912"/>
+            <a:ext cx="11430000" cy="270510"/>
+          </a:xfrm>
+          <a:prstGeom prst="rect">
+            <a:avLst/>
+          </a:prstGeom>
+          <a:noFill/>
+        </p:spPr>
+        <p:txBody>
+          <a:bodyPr wrap="none" lIns="0" rIns="0" tIns="0" bIns="0" anchor="t"/>
+          <a:lstStyle/>
+          <a:p>
+            <a:pPr algn="ctr">
+              <a:lnSpc>
+                <a:spcPts val="2129"/>
+              </a:lnSpc>
+              <a:spcBef>
+                <a:spcPts val="0"/>
+              </a:spcBef>
+              <a:spcAft>
+                <a:spcPts val="0"/>
+              </a:spcAft>
+            </a:pPr>
+            <a:r>
+              <a:rPr sz="1500" b="0" spc="-15" lang="ja-JP" altLang="en-US">
+                <a:solidFill>
+                  <a:srgbClr val="A3A3A3"/>
+                </a:solidFill>
+                <a:latin typeface="Noto Sans JP"/>
+                <a:ea typeface="Noto Sans JP"/>
+                <a:cs typeface="Noto Sans JP"/>
+              </a:rPr>
+              <a:t>旅行会社・DMCからの依頼を受けて、BondExが手配します</a:t>
+            </a:r>
+          </a:p>
+        </p:txBody>
+      </p:sp>
+      <p:sp>
+        <p:nvSpPr>
+          <p:cNvPr id="15" name="見出し"/>
+          <p:cNvSpPr txBox="1"/>
+          <p:nvPr/>
+        </p:nvSpPr>
+        <p:spPr>
+          <a:xfrm>
+            <a:off x="812800" y="692785"/>
+            <a:ext cx="6583759" cy="1658938"/>
+          </a:xfrm>
+          <a:prstGeom prst="rect">
+            <a:avLst/>
+          </a:prstGeom>
+          <a:noFill/>
+        </p:spPr>
+        <p:txBody>
+          <a:bodyPr wrap="none" lIns="0" rIns="0" tIns="0" bIns="0" anchor="t"/>
+          <a:lstStyle/>
+          <a:p>
+            <a:pPr algn="l">
+              <a:lnSpc>
+                <a:spcPts val="6531"/>
+              </a:lnSpc>
+              <a:spcBef>
+                <a:spcPts val="0"/>
+              </a:spcBef>
+              <a:spcAft>
+                <a:spcPts val="0"/>
+              </a:spcAft>
+            </a:pPr>
+            <a:r>
+              <a:rPr sz="4600" b="0" spc="-46" lang="ja-JP" altLang="en-US">
                 <a:solidFill>
                   <a:srgbClr val="FFFFFF"/>
                 </a:solidFill>
@@ -4764,7 +5701,7 @@
           <a:p>
             <a:pPr algn="l">
               <a:lnSpc>
-                <a:spcPts val="8093"/>
+                <a:spcPts val="6531"/>
               </a:lnSpc>
               <a:spcBef>
                 <a:spcPts val="0"/>
@@ -4774,7 +5711,7 @@
               </a:spcAft>
             </a:pPr>
             <a:r>
-              <a:rPr sz="5699" b="0" spc="-57" lang="ja-JP" altLang="en-US">
+              <a:rPr sz="4600" b="0" spc="-46" lang="ja-JP" altLang="en-US">
                 <a:solidFill>
                   <a:srgbClr val="FFFFFF"/>
                 </a:solidFill>

--- a/docs/collateral/seminar-luggage/out/BondEx_Seminar_TypeOnly.pptx
+++ b/docs/collateral/seminar-luggage/out/BondEx_Seminar_TypeOnly.pptx
@@ -13,6 +13,7 @@
     <p:sldId id="261" r:id="rId13"/>
     <p:sldId id="262" r:id="rId14"/>
     <p:sldId id="263" r:id="rId15"/>
+    <p:sldId id="264" r:id="rId16"/>
   </p:sldIdLst>
   <p:sldSz cx="12192000" cy="6858000" type="screen4x3"/>
   <p:notesSz cx="6858000" cy="9144000"/>
@@ -509,50 +510,30 @@
           <a:lstStyle/>
           <a:p>
             <a:r>
-              <a:t>［1分30秒］混雑を「人」ではなく「荷物の移動」という視点で捉え直してもらい、講演全体の問いを立てる。</a:t>
+              <a:t>［0秒］開始前と司会の紹介中に映しておき、講演のテーマとBondExを覚えてもらう。QRコードから公式サイトへ案内する。</a:t>
             </a:r>
           </a:p>
           <a:p/>
           <a:p>
             <a:r>
-              <a:t>皆さん、こんにちは。BondExの［氏名］です。今日は15分ほど、「荷物」のお話をさせてください。</a:t>
-            </a:r>
-          </a:p>
-          <a:p>
-            <a:r>
-              <a:t>最近、「オーバーツーリズム」という言葉を、本当によく耳にします。観光地が混んでいる。電車が混んでいる。確かにその通りです。</a:t>
-            </a:r>
-          </a:p>
-          <a:p>
-            <a:r>
-              <a:t>ただ、駅で少し立ち止まって眺めてみると、気づくことがあります。旅行者が増えるとき、同時に増えているものがある。――スーツケースです。</a:t>
-            </a:r>
-          </a:p>
-          <a:p>
-            <a:r>
-              <a:t>駅のコンコース、電車の中、バス、観光地の坂道。そこを移動しているのは、人だけではありません。人と一緒に、大量の荷物も移動しているんです。</a:t>
-            </a:r>
-          </a:p>
-          <a:p>
-            <a:r>
-              <a:t>ですから今日は、あえてこう問いかけてみたいと思います。これは「オーバーツーリズム」なのか。それとも、「オーバーラゲッジ」なのか。</a:t>
-            </a:r>
-          </a:p>
-          <a:p>
-            <a:r>
-              <a:t>もちろん「オーバーラゲッジ」は正式な言葉ではありません。今日の問題提起のための言葉です。でも、混雑の一部は「人の混雑」ではなく、「荷物の移動」の問題として捉え直せるのではないか。今日はそこから話を始めます。</a:t>
+              <a:t>（会場が開いたら、開始までこの表紙を映しておく）</a:t>
+            </a:r>
+          </a:p>
+          <a:p>
+            <a:r>
+              <a:t>（司会のご紹介が終わったら一礼し、スライド1へ進めてから挨拶を始める）</a:t>
             </a:r>
           </a:p>
           <a:p/>
           <a:p>
             <a:r>
-              <a:t>◆ 強調：移動しているのは、人だけではありません。</a:t>
+              <a:t>◆ 強調：（読み上げなし）</a:t>
             </a:r>
           </a:p>
           <a:p/>
           <a:p>
             <a:r>
-              <a:t>→ つなぎ：「では、そもそも――人と荷物は、一緒に移動しなければいけないのでしょうか。」と問いかけて次へ。</a:t>
+              <a:t>→ つなぎ：一礼してスライド1へ。「皆さん、こんにちは。」</a:t>
             </a:r>
           </a:p>
         </p:txBody>
@@ -622,55 +603,50 @@
           <a:lstStyle/>
           <a:p>
             <a:r>
-              <a:t>［1分30秒］物流の「能力」は既にある。足りないのは旅行との「つながり」だ、という講演の前提を共有する。</a:t>
+              <a:t>［1分30秒］混雑を「人」ではなく「荷物の移動」という視点で捉え直してもらい、講演全体の問いを立てる。</a:t>
             </a:r>
           </a:p>
           <a:p/>
           <a:p>
             <a:r>
-              <a:t>そもそも、人と荷物は一緒に移動する必要があるのでしょうか。</a:t>
-            </a:r>
-          </a:p>
-          <a:p>
-            <a:r>
-              <a:t>私は、必ずしもそうではないと考えています。</a:t>
-            </a:r>
-          </a:p>
-          <a:p>
-            <a:r>
-              <a:t>日本には、世界でも有数の物流インフラがあります。翌日には全国どこへでも荷物が届く。品質も、時間の正確さも、世界トップクラスです。</a:t>
-            </a:r>
-          </a:p>
-          <a:p>
-            <a:r>
-              <a:t>つまり、荷物を運ぶ「能力」が足りないわけではないんです。</a:t>
-            </a:r>
-          </a:p>
-          <a:p>
-            <a:r>
-              <a:t>例えば私たちは、ネットで買い物をすれば翌日には家に届くことを、当たり前だと思っています。ところが同じ国で、旅行者は20キロ、30キロのスーツケースを自分で引いて、駅の階段を上っている。運ぶ力はすぐそばにあるのに、旅行者には届いていないんです。</a:t>
-            </a:r>
-          </a:p>
-          <a:p>
-            <a:r>
-              <a:t>足りないのは、つながりです。旅行は旅行のサービスとして、物流は物流のサービスとして、それぞれ別々に設計されてきました。旅行者から見ると、物流は確かに「ある」。でも、旅の中には「入っていない」。</a:t>
-            </a:r>
-          </a:p>
-          <a:p>
-            <a:r>
-              <a:t>ですから、新しい配送網をゼロから作る必要はありません。すでにある物流を、旅行体験にどうつなげるか。今日お伝えしたいのは、その一点です。</a:t>
+              <a:t>皆さん、こんにちは。BondExの［氏名］です。今日は15分ほど、「荷物」のお話をさせてください。</a:t>
+            </a:r>
+          </a:p>
+          <a:p>
+            <a:r>
+              <a:t>最近、「オーバーツーリズム」という言葉を、本当によく耳にします。観光地が混んでいる。電車が混んでいる。確かにその通りです。</a:t>
+            </a:r>
+          </a:p>
+          <a:p>
+            <a:r>
+              <a:t>ただ、駅で少し立ち止まって眺めてみると、気づくことがあります。旅行者が増えるとき、同時に増えているものがある。――スーツケースです。</a:t>
+            </a:r>
+          </a:p>
+          <a:p>
+            <a:r>
+              <a:t>駅のコンコース、電車の中、バス、観光地の坂道。そこを移動しているのは、人だけではありません。人と一緒に、大量の荷物も移動しているんです。</a:t>
+            </a:r>
+          </a:p>
+          <a:p>
+            <a:r>
+              <a:t>ですから今日は、あえてこう問いかけてみたいと思います。これは「オーバーツーリズム」なのか。それとも、「オーバーラゲッジ」なのか。</a:t>
+            </a:r>
+          </a:p>
+          <a:p>
+            <a:r>
+              <a:t>もちろん「オーバーラゲッジ」は正式な言葉ではありません。今日の問題提起のための言葉です。でも、混雑の一部は「人の混雑」ではなく、「荷物の移動」の問題として捉え直せるのではないか。今日はそこから話を始めます。</a:t>
             </a:r>
           </a:p>
           <a:p/>
           <a:p>
             <a:r>
-              <a:t>◆ 強調：足りないのは、運ぶ能力ではなく、旅とのつながりです。</a:t>
+              <a:t>◆ 強調：移動しているのは、人だけではありません。</a:t>
             </a:r>
           </a:p>
           <a:p/>
           <a:p>
             <a:r>
-              <a:t>→ つなぎ：「ただ、つなげればすぐに使われるかというと、そう簡単ではありません。ある駅で伺ったお話をご紹介します。」</a:t>
+              <a:t>→ つなぎ：「では、そもそも――人と荷物は、一緒に移動しなければいけないのでしょうか。」と問いかけて次へ。</a:t>
             </a:r>
           </a:p>
         </p:txBody>
@@ -740,60 +716,55 @@
           <a:lstStyle/>
           <a:p>
             <a:r>
-              <a:t>［2分］サービスは置くだけでは使われない。旅行者が荷物について意思決定する「タイミング」が重要だと気づいてもらう。</a:t>
+              <a:t>［1分30秒］物流の「能力」は既にある。足りないのは旅行との「つながり」だ、という講演の前提を共有する。</a:t>
             </a:r>
           </a:p>
           <a:p/>
           <a:p>
             <a:r>
-              <a:t>以前、小田急電鉄の現場の方にお話を伺う機会がありました。</a:t>
-            </a:r>
-          </a:p>
-          <a:p>
-            <a:r>
-              <a:t>ロマンスカーの改札前に、荷物配送のサービスがあった時期があるそうです。ところが、利用はあまり多くなかった、と。</a:t>
-            </a:r>
-          </a:p>
-          <a:p>
-            <a:r>
-              <a:t>理由を伺うと、現場の方がこうおっしゃいました。</a:t>
-            </a:r>
-          </a:p>
-          <a:p>
-            <a:r>
-              <a:t>「駅まで荷物を持って来られた人は、そのまま電車に持っていくんですよ」</a:t>
-            </a:r>
-          </a:p>
-          <a:p>
-            <a:r>
-              <a:t>これは、あくまで現場で伺ったお話で、会社としての正式な見解ではありません。ただ私は、この一言にとても大事なことが詰まっていると感じました。</a:t>
-            </a:r>
-          </a:p>
-          <a:p>
-            <a:r>
-              <a:t>考えてみれば当然なんです。ホテルから駅まで、すでに重いスーツケースを運んできた。ここまで来たら、あとは電車に乗せるだけ。その時点で、旅行者の中では「荷物をどうするか」は、もう決まっているんです。</a:t>
-            </a:r>
-          </a:p>
-          <a:p>
-            <a:r>
-              <a:t>誤解のないように申し上げると、駅のサービスが悪いという話ではありません。お伝えしたいのは、配送サービスは「置くだけ」では使われない、ということです。</a:t>
-            </a:r>
-          </a:p>
-          <a:p>
-            <a:r>
-              <a:t>大事なのは、場所よりもタイミング。旅行者が荷物について意思決定する、その瞬間に物流が組み込まれているかどうか。ここが分かれ目です。</a:t>
+              <a:t>そもそも、人と荷物は一緒に移動する必要があるのでしょうか。</a:t>
+            </a:r>
+          </a:p>
+          <a:p>
+            <a:r>
+              <a:t>私は、必ずしもそうではないと考えています。</a:t>
+            </a:r>
+          </a:p>
+          <a:p>
+            <a:r>
+              <a:t>日本には、世界でも有数の物流インフラがあります。翌日には全国どこへでも荷物が届く。品質も、時間の正確さも、世界トップクラスです。</a:t>
+            </a:r>
+          </a:p>
+          <a:p>
+            <a:r>
+              <a:t>つまり、荷物を運ぶ「能力」が足りないわけではないんです。</a:t>
+            </a:r>
+          </a:p>
+          <a:p>
+            <a:r>
+              <a:t>例えば私たちは、ネットで買い物をすれば翌日には家に届くことを、当たり前だと思っています。ところが同じ国で、旅行者は20キロ、30キロのスーツケースを自分で引いて、駅の階段を上っている。運ぶ力はすぐそばにあるのに、旅行者には届いていないんです。</a:t>
+            </a:r>
+          </a:p>
+          <a:p>
+            <a:r>
+              <a:t>足りないのは、つながりです。旅行は旅行のサービスとして、物流は物流のサービスとして、それぞれ別々に設計されてきました。旅行者から見ると、物流は確かに「ある」。でも、旅の中には「入っていない」。</a:t>
+            </a:r>
+          </a:p>
+          <a:p>
+            <a:r>
+              <a:t>ですから、新しい配送網をゼロから作る必要はありません。すでにある物流を、旅行体験にどうつなげるか。今日お伝えしたいのは、その一点です。</a:t>
             </a:r>
           </a:p>
           <a:p/>
           <a:p>
             <a:r>
-              <a:t>◆ 強調：配送サービスは、置くだけでは使われない。</a:t>
+              <a:t>◆ 強調：足りないのは、運ぶ能力ではなく、旅とのつながりです。</a:t>
             </a:r>
           </a:p>
           <a:p/>
           <a:p>
             <a:r>
-              <a:t>→ つなぎ：「では、旅行者が荷物について意思決定する瞬間とは、いつなのか。一番わかりやすいのが、ホテルです。」</a:t>
+              <a:t>→ つなぎ：「ただ、つなげればすぐに使われるかというと、そう簡単ではありません。ある駅で伺ったお話をご紹介します。」</a:t>
             </a:r>
           </a:p>
         </p:txBody>
@@ -863,55 +834,60 @@
           <a:lstStyle/>
           <a:p>
             <a:r>
-              <a:t>［2分］チェックアウトが荷物を手放す自然な接点であることを示し、図を使ってBondExの役割（既存の物流を旅の動線につなぐ）を30秒で紹介する。</a:t>
+              <a:t>［2分］サービスは置くだけでは使われない。旅行者が荷物について意思決定する「タイミング」が重要だと気づいてもらう。</a:t>
             </a:r>
           </a:p>
           <a:p/>
           <a:p>
             <a:r>
-              <a:t>旅行者が、荷物と一番向き合う場所。それはホテルです。</a:t>
-            </a:r>
-          </a:p>
-          <a:p>
-            <a:r>
-              <a:t>チェックアウトの朝を思い出してみてください。部屋で荷物を広げて、今日使うものだけを取り出して、残りをスーツケースに詰める。旅行中に荷物を整理する時間は、ほとんどこの瞬間しかありません。</a:t>
-            </a:r>
-          </a:p>
-          <a:p>
-            <a:r>
-              <a:t>このタイミングで、フロントの方から「このスーツケースは、次のホテルにお送りしておきますね」と言ってもらえたら、どうでしょう。旅行者はその日一日を、身軽に過ごせます。駅の階段も、観光地の坂道も、もう苦になりません。</a:t>
-            </a:r>
-          </a:p>
-          <a:p>
-            <a:r>
-              <a:t>これは、単に「楽になる」というだけではありません。チェックアウトしてから夕方まで、手ぶらで美術館にも、レストランにも、買い物にも行ける。旅程の選択肢そのものが広がるんです。</a:t>
-            </a:r>
-          </a:p>
-          <a:p>
-            <a:r>
-              <a:t>私たちBondExは、まさにここから始めています。ホテルからホテルへの、スーツケース配送です。</a:t>
-            </a:r>
-          </a:p>
-          <a:p>
-            <a:r>
-              <a:t>（図の左の点を指して）チェックアウトのときに、ホテルで荷物を預ける。人は上の点線のように、身軽に観光へ。荷物は下のオレンジの線、今ある物流で、次のホテルへ先回りします。（右の点を指して）夕方、次のホテルに着くと、荷物はもう届いている。旅行会社やDMCの皆さんからご依頼をいただいて、既存の物流ネットワークを使って配送を手配しています。新しく配送網を作っているのではなく、今ある物流を、旅の動線に合わせてつないでいる。それが私たちの役割です。</a:t>
-            </a:r>
-          </a:p>
-          <a:p>
-            <a:r>
-              <a:t>荷物を手放す場所を、旅の中に用意する。これがBondExの出発点です。</a:t>
+              <a:t>以前、小田急電鉄の現場の方にお話を伺う機会がありました。</a:t>
+            </a:r>
+          </a:p>
+          <a:p>
+            <a:r>
+              <a:t>ロマンスカーの改札前に、荷物配送のサービスがあった時期があるそうです。ところが、利用はあまり多くなかった、と。</a:t>
+            </a:r>
+          </a:p>
+          <a:p>
+            <a:r>
+              <a:t>理由を伺うと、現場の方がこうおっしゃいました。</a:t>
+            </a:r>
+          </a:p>
+          <a:p>
+            <a:r>
+              <a:t>「駅まで荷物を持って来られた人は、そのまま電車に持っていくんですよ」</a:t>
+            </a:r>
+          </a:p>
+          <a:p>
+            <a:r>
+              <a:t>これは、あくまで現場で伺ったお話で、会社としての正式な見解ではありません。ただ私は、この一言にとても大事なことが詰まっていると感じました。</a:t>
+            </a:r>
+          </a:p>
+          <a:p>
+            <a:r>
+              <a:t>考えてみれば当然なんです。ホテルから駅まで、すでに重いスーツケースを運んできた。ここまで来たら、あとは電車に乗せるだけ。その時点で、旅行者の中では「荷物をどうするか」は、もう決まっているんです。</a:t>
+            </a:r>
+          </a:p>
+          <a:p>
+            <a:r>
+              <a:t>誤解のないように申し上げると、駅のサービスが悪いという話ではありません。お伝えしたいのは、配送サービスは「置くだけ」では使われない、ということです。</a:t>
+            </a:r>
+          </a:p>
+          <a:p>
+            <a:r>
+              <a:t>大事なのは、場所よりもタイミング。旅行者が荷物について意思決定する、その瞬間に物流が組み込まれているかどうか。ここが分かれ目です。</a:t>
             </a:r>
           </a:p>
           <a:p/>
           <a:p>
             <a:r>
-              <a:t>◆ 強調：荷物を手放す場所を、旅の中に。</a:t>
+              <a:t>◆ 強調：配送サービスは、置くだけでは使われない。</a:t>
             </a:r>
           </a:p>
           <a:p/>
           <a:p>
             <a:r>
-              <a:t>→ つなぎ：「ここまでは、旅の『不便』のお話でした。ですが、荷物の問題は不便だけでは終わりません。私自身の体験をお話しさせてください。」</a:t>
+              <a:t>→ つなぎ：「では、旅行者が荷物について意思決定する瞬間とは、いつなのか。一番わかりやすいのが、ホテルです。」</a:t>
             </a:r>
           </a:p>
         </p:txBody>
@@ -981,60 +957,55 @@
           <a:lstStyle/>
           <a:p>
             <a:r>
-              <a:t>［2分］荷物を持ちたくない心理が、旅行の不便だけでなく購買機会の損失につながっていることを、実体験で実感してもらう。</a:t>
+              <a:t>［2分］チェックアウトが荷物を手放す自然な接点であることを示し、図を使ってBondExの役割（既存の物流を旅の動線につなぐ）を30秒で紹介する。</a:t>
             </a:r>
           </a:p>
           <a:p/>
           <a:p>
             <a:r>
-              <a:t>先日、友人とPARCOで買い物をしていたときのことです。</a:t>
-            </a:r>
-          </a:p>
-          <a:p>
-            <a:r>
-              <a:t>友人が、とても気に入った商品を見つけました。手に取って、鏡の前で合わせてみて、明らかに欲しそうにしている。</a:t>
-            </a:r>
-          </a:p>
-          <a:p>
-            <a:r>
-              <a:t>ところが、少し考えてから、「やっぱり、やめておこうかな」と言うんです。</a:t>
-            </a:r>
-          </a:p>
-          <a:p>
-            <a:r>
-              <a:t>理由を聞くと、「このあと会食があるから、これを持って移動したくない」と。</a:t>
-            </a:r>
-          </a:p>
-          <a:p>
-            <a:r>
-              <a:t>これは、とても象徴的だと思いました。商品が気に入らなかったわけではない。値段で迷ったわけでもない。ただ、「持ちたくない」。それだけで、買い物が止まりかけていたんです。</a:t>
-            </a:r>
-          </a:p>
-          <a:p>
-            <a:r>
-              <a:t>訪日旅行者であれば、なおさらです。このあとも観光が続く。食事の予約もある。ホテルに戻る時間もない。大きな買い物袋を持って歩き回るのは、誰だって避けたいですよね。</a:t>
-            </a:r>
-          </a:p>
-          <a:p>
-            <a:r>
-              <a:t>皆さんの施設でも、同じことが毎日起きているかもしれません。売り場で手に取られたのに、レジまで来なかった商品。その中には、「持ちたくない」という理由で諦められたものが、きっと含まれているはずです。しかもそれは、売上のデータには残りません。買わなかった理由は、どこにも記録されないからです。</a:t>
-            </a:r>
-          </a:p>
-          <a:p>
-            <a:r>
-              <a:t>つまり、荷物を持ちたくないという気持ちは、旅行の不便であると同時に、「購買機会の損失」でもあるんです。</a:t>
+              <a:t>旅行者が、荷物と一番向き合う場所。それはホテルです。</a:t>
+            </a:r>
+          </a:p>
+          <a:p>
+            <a:r>
+              <a:t>チェックアウトの朝を思い出してみてください。部屋で荷物を広げて、今日使うものだけを取り出して、残りをスーツケースに詰める。旅行中に荷物を整理する時間は、ほとんどこの瞬間しかありません。</a:t>
+            </a:r>
+          </a:p>
+          <a:p>
+            <a:r>
+              <a:t>このタイミングで、フロントの方から「このスーツケースは、次のホテルにお送りしておきますね」と言ってもらえたら、どうでしょう。旅行者はその日一日を、身軽に過ごせます。駅の階段も、観光地の坂道も、もう苦になりません。</a:t>
+            </a:r>
+          </a:p>
+          <a:p>
+            <a:r>
+              <a:t>これは、単に「楽になる」というだけではありません。チェックアウトしてから夕方まで、手ぶらで美術館にも、レストランにも、買い物にも行ける。旅程の選択肢そのものが広がるんです。</a:t>
+            </a:r>
+          </a:p>
+          <a:p>
+            <a:r>
+              <a:t>私たちBondExは、まさにここから始めています。ホテルからホテルへの、スーツケース配送です。</a:t>
+            </a:r>
+          </a:p>
+          <a:p>
+            <a:r>
+              <a:t>（図の左の点を指して）チェックアウトのときに、ホテルで荷物を預ける。人は上の点線のように、身軽に観光へ。荷物は下のオレンジの線、今ある物流で、次のホテルへ先回りします。（右の点を指して）夕方、次のホテルに着くと、荷物はもう届いている。旅行会社やDMCの皆さんからご依頼をいただいて、既存の物流ネットワークを使って配送を手配しています。新しく配送網を作っているのではなく、今ある物流を、旅の動線に合わせてつないでいる。それが私たちの役割です。</a:t>
+            </a:r>
+          </a:p>
+          <a:p>
+            <a:r>
+              <a:t>荷物を手放す場所を、旅の中に用意する。これがBondExの出発点です。</a:t>
             </a:r>
           </a:p>
           <a:p/>
           <a:p>
             <a:r>
-              <a:t>◆ 強調：欲しくないのではない。持ちたくないだけ。</a:t>
+              <a:t>◆ 強調：荷物を手放す場所を、旅の中に。</a:t>
             </a:r>
           </a:p>
           <a:p/>
           <a:p>
             <a:r>
-              <a:t>→ つなぎ：金額にはまだ触れない。「では、そのとき私が友人に何を伝えたか。」と一拍おいて次へ。</a:t>
+              <a:t>→ つなぎ：「ここまでは、旅の『不便』のお話でした。ですが、荷物の問題は不便だけでは終わりません。私自身の体験をお話しさせてください。」</a:t>
             </a:r>
           </a:p>
         </p:txBody>
@@ -1104,65 +1075,60 @@
           <a:lstStyle/>
           <a:p>
             <a:r>
-              <a:t>［1分30秒］物流を購入体験に組み込むと購買を後押しできる可能性を、1件の実体験として誠実に示す。講演の転換点。</a:t>
+              <a:t>［2分］荷物を持ちたくない心理が、旅行の不便だけでなく購買機会の損失につながっていることを、実体験で実感してもらう。</a:t>
             </a:r>
           </a:p>
           <a:p/>
           <a:p>
             <a:r>
-              <a:t>私は友人に、「それ、配送できるよ」と伝えました。</a:t>
-            </a:r>
-          </a:p>
-          <a:p>
-            <a:r>
-              <a:t>買った商品は持ち歩かなくていい。あとで届けてもらえばいい。</a:t>
-            </a:r>
-          </a:p>
-          <a:p>
-            <a:r>
-              <a:t>すると友人は、その場で購入を決めました。金額は――約50万円です。</a:t>
-            </a:r>
-          </a:p>
-          <a:p>
-            <a:r>
-              <a:t>（数字を見てもらうために、3秒ほど間を取る）</a:t>
-            </a:r>
-          </a:p>
-          <a:p>
-            <a:r>
-              <a:t>ポイントは、友人が値引きを求めたわけでも、私が説得したわけでもない、ということです。変わったのは、たったひとつ。「持たなくていい」という選択肢が、その場で示されたことだけでした。</a:t>
-            </a:r>
-          </a:p>
-          <a:p>
-            <a:r>
-              <a:t>もちろん、これは私の個人的な体験で、たった1件のお話です。これをもって「配送をご案内すれば売上が何％上がる」と言うつもりはありません。</a:t>
-            </a:r>
-          </a:p>
-          <a:p>
-            <a:r>
-              <a:t>ただ、このとき私は、はっきりと感じました。</a:t>
-            </a:r>
-          </a:p>
-          <a:p>
-            <a:r>
-              <a:t>これは配送の話ではなく、消費の話だと思ったんです。</a:t>
-            </a:r>
-          </a:p>
-          <a:p>
-            <a:r>
-              <a:t>物流を購入体験の中に組み込むことで、「買いたい」という気持ちを最後まで後押しできる。その可能性は十分にある、と考えています。</a:t>
+              <a:t>先日、友人とPARCOで買い物をしていたときのことです。</a:t>
+            </a:r>
+          </a:p>
+          <a:p>
+            <a:r>
+              <a:t>友人が、とても気に入った商品を見つけました。手に取って、鏡の前で合わせてみて、明らかに欲しそうにしている。</a:t>
+            </a:r>
+          </a:p>
+          <a:p>
+            <a:r>
+              <a:t>ところが、少し考えてから、「やっぱり、やめておこうかな」と言うんです。</a:t>
+            </a:r>
+          </a:p>
+          <a:p>
+            <a:r>
+              <a:t>理由を聞くと、「このあと会食があるから、これを持って移動したくない」と。</a:t>
+            </a:r>
+          </a:p>
+          <a:p>
+            <a:r>
+              <a:t>これは、とても象徴的だと思いました。商品が気に入らなかったわけではない。値段で迷ったわけでもない。ただ、「持ちたくない」。それだけで、買い物が止まりかけていたんです。</a:t>
+            </a:r>
+          </a:p>
+          <a:p>
+            <a:r>
+              <a:t>訪日旅行者であれば、なおさらです。このあとも観光が続く。食事の予約もある。ホテルに戻る時間もない。大きな買い物袋を持って歩き回るのは、誰だって避けたいですよね。</a:t>
+            </a:r>
+          </a:p>
+          <a:p>
+            <a:r>
+              <a:t>皆さんの施設でも、同じことが毎日起きているかもしれません。売り場で手に取られたのに、レジまで来なかった商品。その中には、「持ちたくない」という理由で諦められたものが、きっと含まれているはずです。しかもそれは、売上のデータには残りません。買わなかった理由は、どこにも記録されないからです。</a:t>
+            </a:r>
+          </a:p>
+          <a:p>
+            <a:r>
+              <a:t>つまり、荷物を持ちたくないという気持ちは、旅行の不便であると同時に、「購買機会の損失」でもあるんです。</a:t>
             </a:r>
           </a:p>
           <a:p/>
           <a:p>
             <a:r>
-              <a:t>◆ 強調：これは配送の話ではなく、消費の話だと思ったんです。</a:t>
+              <a:t>◆ 強調：欲しくないのではない。持ちたくないだけ。</a:t>
             </a:r>
           </a:p>
           <a:p/>
           <a:p>
             <a:r>
-              <a:t>→ つなぎ：「では、これを商業施設や免税の現場に置き換えると、どうなるでしょうか。」</a:t>
+              <a:t>→ つなぎ：金額にはまだ触れない。「では、そのとき私が友人に何を伝えたか。」と一拍おいて次へ。</a:t>
             </a:r>
           </a:p>
         </p:txBody>
@@ -1232,60 +1198,65 @@
           <a:lstStyle/>
           <a:p>
             <a:r>
-              <a:t>［2分］商業施設では「購入時」が荷物を手放す接点であることを示し、免税・決済・物流を一連の購買体験として設計する提案をする。</a:t>
+              <a:t>［1分30秒］物流を購入体験に組み込むと購買を後押しできる可能性を、1件の実体験として誠実に示す。講演の転換点。</a:t>
             </a:r>
           </a:p>
           <a:p/>
           <a:p>
             <a:r>
-              <a:t>ホテルでは、チェックアウトが荷物を手放す自然なタイミングでした。</a:t>
-            </a:r>
-          </a:p>
-          <a:p>
-            <a:r>
-              <a:t>商業施設で、それに当たるのが「購入の瞬間」です。</a:t>
-            </a:r>
-          </a:p>
-          <a:p>
-            <a:r>
-              <a:t>レジで、あるいは免税カウンターで、「この商品はホテルにお届けできます」とご案内できたら。お客様は買った商品をその場で手放して、そのまま次の観光や食事へ、手ぶらで向かえます。商品は物流ネットワークを通じて、ホテルなどの受取先に届きます。</a:t>
-            </a:r>
-          </a:p>
-          <a:p>
-            <a:r>
-              <a:t>つまり、「買う」と「持つ」を分離する、ということです。</a:t>
-            </a:r>
-          </a:p>
-          <a:p>
-            <a:r>
-              <a:t>お店にとっても意味があります。大きな商品、重い商品、割れやすい商品。これまで旅行者には勧めにくかったものも、自信を持ってご提案できるようになります。</a:t>
-            </a:r>
-          </a:p>
-          <a:p>
-            <a:r>
-              <a:t>ちょうど今、免税制度は大きな変化の時期を迎えています。この変化を、免税の手続きをどう変えるか、だけで終わらせるのはもったいない。購入した後の体験そのものを見直すきっかけにできるはずです。</a:t>
-            </a:r>
-          </a:p>
-          <a:p>
-            <a:r>
-              <a:t>免税、決済、そして物流。この3つを別々の仕組みとしてではなく、ひとつながりの購買体験として設計する。商業施設や免税に携わる皆さんと、ぜひご一緒に考えたいテーマです。</a:t>
-            </a:r>
-          </a:p>
-          <a:p>
-            <a:r>
-              <a:t>空港での受け取りなど、制度や運用の整理が必要な部分は、まだあります。そこはこれから、皆さんと一緒に詰めていきたいと思っています。</a:t>
+              <a:t>私は友人に、「それ、配送できるよ」と伝えました。</a:t>
+            </a:r>
+          </a:p>
+          <a:p>
+            <a:r>
+              <a:t>買った商品は持ち歩かなくていい。あとで届けてもらえばいい。</a:t>
+            </a:r>
+          </a:p>
+          <a:p>
+            <a:r>
+              <a:t>すると友人は、その場で購入を決めました。金額は――約50万円です。</a:t>
+            </a:r>
+          </a:p>
+          <a:p>
+            <a:r>
+              <a:t>（数字を見てもらうために、3秒ほど間を取る）</a:t>
+            </a:r>
+          </a:p>
+          <a:p>
+            <a:r>
+              <a:t>ポイントは、友人が値引きを求めたわけでも、私が説得したわけでもない、ということです。変わったのは、たったひとつ。「持たなくていい」という選択肢が、その場で示されたことだけでした。</a:t>
+            </a:r>
+          </a:p>
+          <a:p>
+            <a:r>
+              <a:t>もちろん、これは私の個人的な体験で、たった1件のお話です。これをもって「配送をご案内すれば売上が何％上がる」と言うつもりはありません。</a:t>
+            </a:r>
+          </a:p>
+          <a:p>
+            <a:r>
+              <a:t>ただ、このとき私は、はっきりと感じました。</a:t>
+            </a:r>
+          </a:p>
+          <a:p>
+            <a:r>
+              <a:t>これは配送の話ではなく、消費の話だと思ったんです。</a:t>
+            </a:r>
+          </a:p>
+          <a:p>
+            <a:r>
+              <a:t>物流を購入体験の中に組み込むことで、「買いたい」という気持ちを最後まで後押しできる。その可能性は十分にある、と考えています。</a:t>
             </a:r>
           </a:p>
           <a:p/>
           <a:p>
             <a:r>
-              <a:t>◆ 強調：「買う」と「持つ」を、分離する。</a:t>
+              <a:t>◆ 強調：これは配送の話ではなく、消費の話だと思ったんです。</a:t>
             </a:r>
           </a:p>
           <a:p/>
           <a:p>
             <a:r>
-              <a:t>→ つなぎ：「最後に、私たちが目指している姿をお話しして、終わりたいと思います。」</a:t>
+              <a:t>→ つなぎ：「では、これを商業施設や免税の現場に置き換えると、どうなるでしょうか。」</a:t>
             </a:r>
           </a:p>
         </p:txBody>
@@ -1311,6 +1282,129 @@
 </file>
 
 <file path=ppt/notesSlides/notesSlide8.xml><?xml version="1.0" encoding="utf-8"?>
+<p:notes xmlns:a="http://schemas.openxmlformats.org/drawingml/2006/main" xmlns:p="http://schemas.openxmlformats.org/presentationml/2006/main" xmlns:r="http://schemas.openxmlformats.org/officeDocument/2006/relationships">
+  <p:cSld>
+    <p:spTree>
+      <p:nvGrpSpPr>
+        <p:cNvPr id="1" name=""/>
+        <p:cNvGrpSpPr/>
+        <p:nvPr/>
+      </p:nvGrpSpPr>
+      <p:grpSpPr>
+        <a:xfrm>
+          <a:off x="0" y="0"/>
+          <a:ext cx="0" cy="0"/>
+          <a:chOff x="0" y="0"/>
+          <a:chExt cx="0" cy="0"/>
+        </a:xfrm>
+      </p:grpSpPr>
+      <p:sp>
+        <p:nvSpPr>
+          <p:cNvPr id="2" name="Slide Image Placeholder 1"/>
+          <p:cNvSpPr>
+            <a:spLocks noGrp="1"/>
+          </p:cNvSpPr>
+          <p:nvPr>
+            <p:ph type="sldImg" idx="2"/>
+          </p:nvPr>
+        </p:nvSpPr>
+        <p:spPr/>
+      </p:sp>
+      <p:sp>
+        <p:nvSpPr>
+          <p:cNvPr id="3" name="Notes Placeholder 2"/>
+          <p:cNvSpPr>
+            <a:spLocks noGrp="1"/>
+          </p:cNvSpPr>
+          <p:nvPr>
+            <p:ph type="body" idx="3" sz="quarter"/>
+          </p:nvPr>
+        </p:nvSpPr>
+        <p:spPr/>
+        <p:txBody>
+          <a:bodyPr/>
+          <a:lstStyle/>
+          <a:p>
+            <a:r>
+              <a:t>［2分］商業施設では「購入時」が荷物を手放す接点であることを示し、免税・決済・物流を一連の購買体験として設計する提案をする。</a:t>
+            </a:r>
+          </a:p>
+          <a:p/>
+          <a:p>
+            <a:r>
+              <a:t>ホテルでは、チェックアウトが荷物を手放す自然なタイミングでした。</a:t>
+            </a:r>
+          </a:p>
+          <a:p>
+            <a:r>
+              <a:t>商業施設で、それに当たるのが「購入の瞬間」です。</a:t>
+            </a:r>
+          </a:p>
+          <a:p>
+            <a:r>
+              <a:t>レジで、あるいは免税カウンターで、「この商品はホテルにお届けできます」とご案内できたら。お客様は買った商品をその場で手放して、そのまま次の観光や食事へ、手ぶらで向かえます。商品は物流ネットワークを通じて、ホテルなどの受取先に届きます。</a:t>
+            </a:r>
+          </a:p>
+          <a:p>
+            <a:r>
+              <a:t>つまり、「買う」と「持つ」を分離する、ということです。</a:t>
+            </a:r>
+          </a:p>
+          <a:p>
+            <a:r>
+              <a:t>お店にとっても意味があります。大きな商品、重い商品、割れやすい商品。これまで旅行者には勧めにくかったものも、自信を持ってご提案できるようになります。</a:t>
+            </a:r>
+          </a:p>
+          <a:p>
+            <a:r>
+              <a:t>ちょうど今、免税制度は大きな変化の時期を迎えています。この変化を、免税の手続きをどう変えるか、だけで終わらせるのはもったいない。購入した後の体験そのものを見直すきっかけにできるはずです。</a:t>
+            </a:r>
+          </a:p>
+          <a:p>
+            <a:r>
+              <a:t>免税、決済、そして物流。この3つを別々の仕組みとしてではなく、ひとつながりの購買体験として設計する。商業施設や免税に携わる皆さんと、ぜひご一緒に考えたいテーマです。</a:t>
+            </a:r>
+          </a:p>
+          <a:p>
+            <a:r>
+              <a:t>空港での受け取りなど、制度や運用の整理が必要な部分は、まだあります。そこはこれから、皆さんと一緒に詰めていきたいと思っています。</a:t>
+            </a:r>
+          </a:p>
+          <a:p/>
+          <a:p>
+            <a:r>
+              <a:t>◆ 強調：「買う」と「持つ」を、分離する。</a:t>
+            </a:r>
+          </a:p>
+          <a:p/>
+          <a:p>
+            <a:r>
+              <a:t>→ つなぎ：「最後に、私たちが目指している姿をお話しして、終わりたいと思います。」</a:t>
+            </a:r>
+          </a:p>
+        </p:txBody>
+      </p:sp>
+      <p:sp>
+        <p:nvSpPr>
+          <p:cNvPr id="4" name="Slide Number Placeholder 3"/>
+          <p:cNvSpPr>
+            <a:spLocks noGrp="1"/>
+          </p:cNvSpPr>
+          <p:nvPr>
+            <p:ph type="sldNum" idx="5" sz="quarter"/>
+          </p:nvPr>
+        </p:nvSpPr>
+        <p:spPr/>
+      </p:sp>
+    </p:spTree>
+  </p:cSld>
+  <p:clrMapOvr>
+    <a:masterClrMapping/>
+  </p:clrMapOvr>
+</p:notes>
+</file>
+
+<file path=ppt/notesSlides/notesSlide9.xml><?xml version="1.0" encoding="utf-8"?>
 <p:notes xmlns:a="http://schemas.openxmlformats.org/drawingml/2006/main" xmlns:p="http://schemas.openxmlformats.org/presentationml/2006/main" xmlns:r="http://schemas.openxmlformats.org/officeDocument/2006/relationships">
   <p:cSld>
     <p:spTree>
@@ -4427,16 +4521,40 @@
         <p:nvPr/>
       </p:nvGrpSpPr>
       <p:grpSpPr/>
-      <p:sp>
-        <p:nvSpPr>
-          <p:cNvPr id="2" name="見出し"/>
+      <p:pic>
+        <p:nvPicPr>
+          <p:cNvPr id="2" name="BondEx ロゴ" descr="bondex-logo-white.png"/>
+          <p:cNvPicPr>
+            <a:picLocks noChangeAspect="1"/>
+          </p:cNvPicPr>
+          <p:nvPr/>
+        </p:nvPicPr>
+        <p:blipFill>
+          <a:blip r:embed="rId2"/>
+          <a:stretch>
+            <a:fillRect/>
+          </a:stretch>
+        </p:blipFill>
+        <p:spPr>
+          <a:xfrm>
+            <a:off x="812800" y="736600"/>
+            <a:ext cx="1874639" cy="330200"/>
+          </a:xfrm>
+          <a:prstGeom prst="rect">
+            <a:avLst/>
+          </a:prstGeom>
+        </p:spPr>
+      </p:pic>
+      <p:sp>
+        <p:nvSpPr>
+          <p:cNvPr id="3" name="見出し"/>
           <p:cNvSpPr txBox="1"/>
           <p:nvPr/>
         </p:nvSpPr>
         <p:spPr>
           <a:xfrm>
-            <a:off x="812800" y="2476500"/>
-            <a:ext cx="11038780" cy="1981200"/>
+            <a:off x="482600" y="1855470"/>
+            <a:ext cx="10314980" cy="1875433"/>
           </a:xfrm>
           <a:prstGeom prst="rect">
             <a:avLst/>
@@ -4447,9 +4565,9 @@
           <a:bodyPr wrap="none" lIns="0" rIns="0" tIns="0" bIns="0" anchor="t"/>
           <a:lstStyle/>
           <a:p>
-            <a:pPr algn="l">
+            <a:pPr algn="l" marL="330200">
               <a:lnSpc>
-                <a:spcPts val="7800"/>
+                <a:spcPts val="7384"/>
               </a:lnSpc>
               <a:spcBef>
                 <a:spcPts val="0"/>
@@ -4459,21 +4577,21 @@
               </a:spcAft>
             </a:pPr>
             <a:r>
-              <a:rPr sz="7500" b="0" spc="-188" lang="ja-JP" altLang="en-US">
+              <a:rPr sz="5200" b="0" spc="-52" lang="ja-JP" altLang="en-US">
                 <a:solidFill>
                   <a:srgbClr val="FFFFFF"/>
                 </a:solidFill>
-                <a:latin typeface="Inter SemiBold"/>
-                <a:ea typeface="Inter SemiBold"/>
-                <a:cs typeface="Inter SemiBold"/>
+                <a:latin typeface="Noto Sans JP Medium"/>
+                <a:ea typeface="Noto Sans JP Medium"/>
+                <a:cs typeface="Noto Sans JP Medium"/>
               </a:rPr>
-              <a:t>OVER TOURISM?</a:t>
+              <a:t>日本旅行から、</a:t>
             </a:r>
           </a:p>
           <a:p>
             <a:pPr algn="l">
               <a:lnSpc>
-                <a:spcPts val="7800"/>
+                <a:spcPts val="7384"/>
               </a:lnSpc>
               <a:spcBef>
                 <a:spcPts val="0"/>
@@ -4483,26 +4601,131 @@
               </a:spcAft>
             </a:pPr>
             <a:r>
-              <a:rPr sz="7500" b="0" spc="-188" lang="ja-JP" altLang="en-US">
+              <a:rPr sz="5200" b="0" spc="-52" lang="ja-JP" altLang="en-US">
                 <a:solidFill>
                   <a:srgbClr val="FFFFFF"/>
+                </a:solidFill>
+                <a:latin typeface="Noto Sans JP Medium"/>
+                <a:ea typeface="Noto Sans JP Medium"/>
+                <a:cs typeface="Noto Sans JP Medium"/>
+              </a:rPr>
+              <a:t>「自分で荷物を運ぶ」をなくす。</a:t>
+            </a:r>
+          </a:p>
+        </p:txBody>
+      </p:sp>
+      <p:sp>
+        <p:nvSpPr>
+          <p:cNvPr id="4" name="タグライン"/>
+          <p:cNvSpPr txBox="1"/>
+          <p:nvPr/>
+        </p:nvSpPr>
+        <p:spPr>
+          <a:xfrm>
+            <a:off x="812800" y="4067044"/>
+            <a:ext cx="4809728" cy="252412"/>
+          </a:xfrm>
+          <a:prstGeom prst="rect">
+            <a:avLst/>
+          </a:prstGeom>
+          <a:noFill/>
+        </p:spPr>
+        <p:txBody>
+          <a:bodyPr wrap="none" lIns="0" rIns="0" tIns="0" bIns="0" anchor="t"/>
+          <a:lstStyle/>
+          <a:p>
+            <a:pPr>
+              <a:lnSpc>
+                <a:spcPts val="1988"/>
+              </a:lnSpc>
+              <a:spcBef>
+                <a:spcPts val="0"/>
+              </a:spcBef>
+              <a:spcAft>
+                <a:spcPts val="0"/>
+              </a:spcAft>
+            </a:pPr>
+            <a:r>
+              <a:rPr sz="1400" b="0" spc="280" lang="ja-JP" altLang="en-US">
+                <a:solidFill>
+                  <a:srgbClr val="A3A3A3"/>
                 </a:solidFill>
                 <a:latin typeface="Inter SemiBold"/>
                 <a:ea typeface="Inter SemiBold"/>
                 <a:cs typeface="Inter SemiBold"/>
               </a:rPr>
-              <a:t>OR </a:t>
-            </a:r>
-            <a:r>
-              <a:rPr sz="7500" b="0" spc="-188" lang="ja-JP" altLang="en-US">
+              <a:t>TRAVEL LIGHTER. TRAVEL FURTHER.</a:t>
+            </a:r>
+          </a:p>
+        </p:txBody>
+      </p:sp>
+      <p:pic>
+        <p:nvPicPr>
+          <p:cNvPr id="5" name="QRコード（https://bondex.express）" descr="qr-bondex-express.png">
+            <a:hlinkClick r:id="rId4"/>
+          </p:cNvPr>
+          <p:cNvPicPr>
+            <a:picLocks noChangeAspect="1"/>
+          </p:cNvPicPr>
+          <p:nvPr/>
+        </p:nvPicPr>
+        <p:blipFill>
+          <a:blip r:embed="rId3"/>
+          <a:stretch>
+            <a:fillRect/>
+          </a:stretch>
+        </p:blipFill>
+        <p:spPr>
+          <a:xfrm>
+            <a:off x="9474200" y="4216400"/>
+            <a:ext cx="1905000" cy="1905000"/>
+          </a:xfrm>
+          <a:prstGeom prst="rect">
+            <a:avLst/>
+          </a:prstGeom>
+        </p:spPr>
+      </p:pic>
+      <p:sp>
+        <p:nvSpPr>
+          <p:cNvPr id="6" name="QRの説明"/>
+          <p:cNvSpPr txBox="1"/>
+          <p:nvPr/>
+        </p:nvSpPr>
+        <p:spPr>
+          <a:xfrm>
+            <a:off x="5461000" y="5893574"/>
+            <a:ext cx="3810000" cy="216396"/>
+          </a:xfrm>
+          <a:prstGeom prst="rect">
+            <a:avLst/>
+          </a:prstGeom>
+          <a:noFill/>
+        </p:spPr>
+        <p:txBody>
+          <a:bodyPr wrap="none" lIns="0" rIns="0" tIns="0" bIns="0" anchor="t"/>
+          <a:lstStyle/>
+          <a:p>
+            <a:pPr algn="r">
+              <a:lnSpc>
+                <a:spcPts val="1704"/>
+              </a:lnSpc>
+              <a:spcBef>
+                <a:spcPts val="0"/>
+              </a:spcBef>
+              <a:spcAft>
+                <a:spcPts val="0"/>
+              </a:spcAft>
+            </a:pPr>
+            <a:r>
+              <a:rPr sz="1200" b="0" lang="ja-JP" altLang="en-US">
                 <a:solidFill>
-                  <a:srgbClr val="F26A1B"/>
+                  <a:srgbClr val="A3A3A3"/>
                 </a:solidFill>
-                <a:latin typeface="Inter SemiBold"/>
-                <a:ea typeface="Inter SemiBold"/>
-                <a:cs typeface="Inter SemiBold"/>
+                <a:latin typeface="Noto Sans JP"/>
+                <a:ea typeface="Noto Sans JP"/>
+                <a:cs typeface="Noto Sans JP"/>
               </a:rPr>
-              <a:t>“OVER LUGGAGE”?</a:t>
+              <a:t>BondEx 公式サイト</a:t>
             </a:r>
           </a:p>
         </p:txBody>
@@ -4541,8 +4764,8 @@
         </p:nvSpPr>
         <p:spPr>
           <a:xfrm>
-            <a:off x="812800" y="2432901"/>
-            <a:ext cx="10742331" cy="1893491"/>
+            <a:off x="812800" y="2476500"/>
+            <a:ext cx="11038780" cy="1981200"/>
           </a:xfrm>
           <a:prstGeom prst="rect">
             <a:avLst/>
@@ -4555,7 +4778,7 @@
           <a:p>
             <a:pPr algn="l">
               <a:lnSpc>
-                <a:spcPts val="7446"/>
+                <a:spcPts val="7800"/>
               </a:lnSpc>
               <a:spcBef>
                 <a:spcPts val="0"/>
@@ -4565,21 +4788,21 @@
               </a:spcAft>
             </a:pPr>
             <a:r>
-              <a:rPr sz="5244" b="0" spc="-52" lang="ja-JP" altLang="en-US">
+              <a:rPr sz="7500" b="0" spc="-188" lang="ja-JP" altLang="en-US">
                 <a:solidFill>
                   <a:srgbClr val="FFFFFF"/>
                 </a:solidFill>
-                <a:latin typeface="Noto Sans JP Medium"/>
-                <a:ea typeface="Noto Sans JP Medium"/>
-                <a:cs typeface="Noto Sans JP Medium"/>
+                <a:latin typeface="Inter SemiBold"/>
+                <a:ea typeface="Inter SemiBold"/>
+                <a:cs typeface="Inter SemiBold"/>
               </a:rPr>
-              <a:t>人と荷物は、</a:t>
+              <a:t>OVER TOURISM?</a:t>
             </a:r>
           </a:p>
           <a:p>
             <a:pPr algn="l">
               <a:lnSpc>
-                <a:spcPts val="7446"/>
+                <a:spcPts val="7800"/>
               </a:lnSpc>
               <a:spcBef>
                 <a:spcPts val="0"/>
@@ -4589,15 +4812,26 @@
               </a:spcAft>
             </a:pPr>
             <a:r>
-              <a:rPr sz="5244" b="0" spc="-52" lang="ja-JP" altLang="en-US">
+              <a:rPr sz="7500" b="0" spc="-188" lang="ja-JP" altLang="en-US">
                 <a:solidFill>
                   <a:srgbClr val="FFFFFF"/>
                 </a:solidFill>
-                <a:latin typeface="Noto Sans JP Medium"/>
-                <a:ea typeface="Noto Sans JP Medium"/>
-                <a:cs typeface="Noto Sans JP Medium"/>
+                <a:latin typeface="Inter SemiBold"/>
+                <a:ea typeface="Inter SemiBold"/>
+                <a:cs typeface="Inter SemiBold"/>
               </a:rPr>
-              <a:t>一緒に移動する必要があるのか？</a:t>
+              <a:t>OR </a:t>
+            </a:r>
+            <a:r>
+              <a:rPr sz="7500" b="0" spc="-188" lang="ja-JP" altLang="en-US">
+                <a:solidFill>
+                  <a:srgbClr val="F26A1B"/>
+                </a:solidFill>
+                <a:latin typeface="Inter SemiBold"/>
+                <a:ea typeface="Inter SemiBold"/>
+                <a:cs typeface="Inter SemiBold"/>
+              </a:rPr>
+              <a:t>“OVER LUGGAGE”?</a:t>
             </a:r>
           </a:p>
         </p:txBody>
@@ -4636,8 +4870,8 @@
         </p:nvSpPr>
         <p:spPr>
           <a:xfrm>
-            <a:off x="450850" y="2346008"/>
-            <a:ext cx="9107984" cy="2055812"/>
+            <a:off x="812800" y="2432901"/>
+            <a:ext cx="10742331" cy="1893491"/>
           </a:xfrm>
           <a:prstGeom prst="rect">
             <a:avLst/>
@@ -4650,7 +4884,7 @@
           <a:p>
             <a:pPr algn="l">
               <a:lnSpc>
-                <a:spcPts val="8093"/>
+                <a:spcPts val="7446"/>
               </a:lnSpc>
               <a:spcBef>
                 <a:spcPts val="0"/>
@@ -4660,7 +4894,7 @@
               </a:spcAft>
             </a:pPr>
             <a:r>
-              <a:rPr sz="5699" b="0" spc="-57" lang="ja-JP" altLang="en-US">
+              <a:rPr sz="5244" b="0" spc="-52" lang="ja-JP" altLang="en-US">
                 <a:solidFill>
                   <a:srgbClr val="FFFFFF"/>
                 </a:solidFill>
@@ -4668,13 +4902,13 @@
                 <a:ea typeface="Noto Sans JP Medium"/>
                 <a:cs typeface="Noto Sans JP Medium"/>
               </a:rPr>
-              <a:t>「配送できる」だけでは、</a:t>
-            </a:r>
-          </a:p>
-          <a:p>
-            <a:pPr algn="l" marL="361950">
+              <a:t>人と荷物は、</a:t>
+            </a:r>
+          </a:p>
+          <a:p>
+            <a:pPr algn="l">
               <a:lnSpc>
-                <a:spcPts val="8093"/>
+                <a:spcPts val="7446"/>
               </a:lnSpc>
               <a:spcBef>
                 <a:spcPts val="0"/>
@@ -4684,7 +4918,7 @@
               </a:spcAft>
             </a:pPr>
             <a:r>
-              <a:rPr sz="5699" b="0" spc="-57" lang="ja-JP" altLang="en-US">
+              <a:rPr sz="5244" b="0" spc="-52" lang="ja-JP" altLang="en-US">
                 <a:solidFill>
                   <a:srgbClr val="FFFFFF"/>
                 </a:solidFill>
@@ -4692,7 +4926,7 @@
                 <a:ea typeface="Noto Sans JP Medium"/>
                 <a:cs typeface="Noto Sans JP Medium"/>
               </a:rPr>
-              <a:t>使われない。</a:t>
+              <a:t>一緒に移動する必要があるのか？</a:t>
             </a:r>
           </a:p>
         </p:txBody>
@@ -4725,631 +4959,14 @@
       <p:grpSpPr/>
       <p:sp>
         <p:nvSpPr>
-          <p:cNvPr id="2" name="図・線1"/>
-          <p:cNvSpPr/>
+          <p:cNvPr id="2" name="見出し"/>
+          <p:cNvSpPr txBox="1"/>
           <p:nvPr/>
         </p:nvSpPr>
         <p:spPr>
           <a:xfrm>
-            <a:off x="2540000" y="4381500"/>
-            <a:ext cx="1016000" cy="0"/>
-          </a:xfrm>
-          <a:custGeom>
-            <a:avLst/>
-            <a:gdLst/>
-            <a:ahLst/>
-            <a:cxnLst/>
-            <a:rect l="l" t="t" r="r" b="b"/>
-            <a:pathLst>
-              <a:path w="1016000" h="0">
-                <a:moveTo>
-                  <a:pt x="0" y="0"/>
-                </a:moveTo>
-                <a:lnTo>
-                  <a:pt x="1016000" y="0"/>
-                </a:lnTo>
-              </a:path>
-            </a:pathLst>
-          </a:custGeom>
-          <a:noFill/>
-          <a:ln w="38100" cap="rnd">
-            <a:solidFill>
-              <a:srgbClr val="FFFFFF"/>
-            </a:solidFill>
-            <a:round/>
-          </a:ln>
-        </p:spPr>
-        <p:txBody>
-          <a:bodyPr rtlCol="0" anchor="ctr"/>
-          <a:lstStyle/>
-          <a:p>
-            <a:pPr algn="ctr"/>
-          </a:p>
-        </p:txBody>
-      </p:sp>
-      <p:sp>
-        <p:nvSpPr>
-          <p:cNvPr id="3" name="図・線2"/>
-          <p:cNvSpPr/>
-          <p:nvPr/>
-        </p:nvSpPr>
-        <p:spPr>
-          <a:xfrm>
-            <a:off x="3556000" y="3587750"/>
-            <a:ext cx="5080000" cy="793750"/>
-          </a:xfrm>
-          <a:custGeom>
-            <a:avLst/>
-            <a:gdLst/>
-            <a:ahLst/>
-            <a:cxnLst/>
-            <a:rect l="l" t="t" r="r" b="b"/>
-            <a:pathLst>
-              <a:path w="5080000" h="793750">
-                <a:moveTo>
-                  <a:pt x="0" y="793750"/>
-                </a:moveTo>
-                <a:lnTo>
-                  <a:pt x="79375" y="744916"/>
-                </a:lnTo>
-                <a:lnTo>
-                  <a:pt x="158750" y="697632"/>
-                </a:lnTo>
-                <a:lnTo>
-                  <a:pt x="238125" y="651898"/>
-                </a:lnTo>
-                <a:lnTo>
-                  <a:pt x="317500" y="607715"/>
-                </a:lnTo>
-                <a:lnTo>
-                  <a:pt x="396875" y="565082"/>
-                </a:lnTo>
-                <a:lnTo>
-                  <a:pt x="476250" y="523999"/>
-                </a:lnTo>
-                <a:lnTo>
-                  <a:pt x="555625" y="484467"/>
-                </a:lnTo>
-                <a:lnTo>
-                  <a:pt x="635000" y="446484"/>
-                </a:lnTo>
-                <a:lnTo>
-                  <a:pt x="714375" y="410052"/>
-                </a:lnTo>
-                <a:lnTo>
-                  <a:pt x="793750" y="375171"/>
-                </a:lnTo>
-                <a:lnTo>
-                  <a:pt x="873125" y="341840"/>
-                </a:lnTo>
-                <a:lnTo>
-                  <a:pt x="952500" y="310059"/>
-                </a:lnTo>
-                <a:lnTo>
-                  <a:pt x="1031875" y="279828"/>
-                </a:lnTo>
-                <a:lnTo>
-                  <a:pt x="1111250" y="251147"/>
-                </a:lnTo>
-                <a:lnTo>
-                  <a:pt x="1190625" y="224017"/>
-                </a:lnTo>
-                <a:lnTo>
-                  <a:pt x="1270000" y="198438"/>
-                </a:lnTo>
-                <a:lnTo>
-                  <a:pt x="1349375" y="174408"/>
-                </a:lnTo>
-                <a:lnTo>
-                  <a:pt x="1428750" y="151929"/>
-                </a:lnTo>
-                <a:lnTo>
-                  <a:pt x="1508125" y="131000"/>
-                </a:lnTo>
-                <a:lnTo>
-                  <a:pt x="1587500" y="111621"/>
-                </a:lnTo>
-                <a:lnTo>
-                  <a:pt x="1666875" y="93793"/>
-                </a:lnTo>
-                <a:lnTo>
-                  <a:pt x="1746250" y="77515"/>
-                </a:lnTo>
-                <a:lnTo>
-                  <a:pt x="1825625" y="62787"/>
-                </a:lnTo>
-                <a:lnTo>
-                  <a:pt x="1905000" y="49609"/>
-                </a:lnTo>
-                <a:lnTo>
-                  <a:pt x="1984375" y="37982"/>
-                </a:lnTo>
-                <a:lnTo>
-                  <a:pt x="2063750" y="27905"/>
-                </a:lnTo>
-                <a:lnTo>
-                  <a:pt x="2143125" y="19379"/>
-                </a:lnTo>
-                <a:lnTo>
-                  <a:pt x="2222500" y="12402"/>
-                </a:lnTo>
-                <a:lnTo>
-                  <a:pt x="2301875" y="6976"/>
-                </a:lnTo>
-                <a:lnTo>
-                  <a:pt x="2381250" y="3101"/>
-                </a:lnTo>
-                <a:lnTo>
-                  <a:pt x="2460625" y="775"/>
-                </a:lnTo>
-                <a:lnTo>
-                  <a:pt x="2540000" y="0"/>
-                </a:lnTo>
-                <a:lnTo>
-                  <a:pt x="2619375" y="775"/>
-                </a:lnTo>
-                <a:lnTo>
-                  <a:pt x="2698750" y="3101"/>
-                </a:lnTo>
-                <a:lnTo>
-                  <a:pt x="2778125" y="6976"/>
-                </a:lnTo>
-                <a:lnTo>
-                  <a:pt x="2857500" y="12402"/>
-                </a:lnTo>
-                <a:lnTo>
-                  <a:pt x="2936875" y="19379"/>
-                </a:lnTo>
-                <a:lnTo>
-                  <a:pt x="3016250" y="27905"/>
-                </a:lnTo>
-                <a:lnTo>
-                  <a:pt x="3095625" y="37982"/>
-                </a:lnTo>
-                <a:lnTo>
-                  <a:pt x="3175000" y="49609"/>
-                </a:lnTo>
-                <a:lnTo>
-                  <a:pt x="3254375" y="62787"/>
-                </a:lnTo>
-                <a:lnTo>
-                  <a:pt x="3333750" y="77515"/>
-                </a:lnTo>
-                <a:lnTo>
-                  <a:pt x="3413125" y="93793"/>
-                </a:lnTo>
-                <a:lnTo>
-                  <a:pt x="3492500" y="111621"/>
-                </a:lnTo>
-                <a:lnTo>
-                  <a:pt x="3571875" y="131000"/>
-                </a:lnTo>
-                <a:lnTo>
-                  <a:pt x="3651250" y="151929"/>
-                </a:lnTo>
-                <a:lnTo>
-                  <a:pt x="3730625" y="174408"/>
-                </a:lnTo>
-                <a:lnTo>
-                  <a:pt x="3810000" y="198438"/>
-                </a:lnTo>
-                <a:lnTo>
-                  <a:pt x="3889375" y="224017"/>
-                </a:lnTo>
-                <a:lnTo>
-                  <a:pt x="3968750" y="251147"/>
-                </a:lnTo>
-                <a:lnTo>
-                  <a:pt x="4048125" y="279828"/>
-                </a:lnTo>
-                <a:lnTo>
-                  <a:pt x="4127500" y="310059"/>
-                </a:lnTo>
-                <a:lnTo>
-                  <a:pt x="4206875" y="341840"/>
-                </a:lnTo>
-                <a:lnTo>
-                  <a:pt x="4286250" y="375171"/>
-                </a:lnTo>
-                <a:lnTo>
-                  <a:pt x="4365625" y="410052"/>
-                </a:lnTo>
-                <a:lnTo>
-                  <a:pt x="4445000" y="446484"/>
-                </a:lnTo>
-                <a:lnTo>
-                  <a:pt x="4524375" y="484467"/>
-                </a:lnTo>
-                <a:lnTo>
-                  <a:pt x="4603750" y="523999"/>
-                </a:lnTo>
-                <a:lnTo>
-                  <a:pt x="4683125" y="565082"/>
-                </a:lnTo>
-                <a:lnTo>
-                  <a:pt x="4762500" y="607715"/>
-                </a:lnTo>
-                <a:lnTo>
-                  <a:pt x="4841875" y="651898"/>
-                </a:lnTo>
-                <a:lnTo>
-                  <a:pt x="4921250" y="697632"/>
-                </a:lnTo>
-                <a:lnTo>
-                  <a:pt x="5000625" y="744916"/>
-                </a:lnTo>
-                <a:lnTo>
-                  <a:pt x="5080000" y="793750"/>
-                </a:lnTo>
-              </a:path>
-            </a:pathLst>
-          </a:custGeom>
-          <a:noFill/>
-          <a:ln w="31750" cap="rnd">
-            <a:solidFill>
-              <a:srgbClr val="FFFFFF">
-                <a:alpha val="85000"/>
-              </a:srgbClr>
-            </a:solidFill>
-            <a:custDash>
-              <a:ds d="20000" sp="320000"/>
-            </a:custDash>
-            <a:round/>
-          </a:ln>
-        </p:spPr>
-        <p:txBody>
-          <a:bodyPr rtlCol="0" anchor="ctr"/>
-          <a:lstStyle/>
-          <a:p>
-            <a:pPr algn="ctr"/>
-          </a:p>
-        </p:txBody>
-      </p:sp>
-      <p:sp>
-        <p:nvSpPr>
-          <p:cNvPr id="4" name="図・線3"/>
-          <p:cNvSpPr/>
-          <p:nvPr/>
-        </p:nvSpPr>
-        <p:spPr>
-          <a:xfrm>
-            <a:off x="3556000" y="4381500"/>
-            <a:ext cx="5080000" cy="793750"/>
-          </a:xfrm>
-          <a:custGeom>
-            <a:avLst/>
-            <a:gdLst/>
-            <a:ahLst/>
-            <a:cxnLst/>
-            <a:rect l="l" t="t" r="r" b="b"/>
-            <a:pathLst>
-              <a:path w="5080000" h="793750">
-                <a:moveTo>
-                  <a:pt x="0" y="0"/>
-                </a:moveTo>
-                <a:lnTo>
-                  <a:pt x="79375" y="48834"/>
-                </a:lnTo>
-                <a:lnTo>
-                  <a:pt x="158750" y="96118"/>
-                </a:lnTo>
-                <a:lnTo>
-                  <a:pt x="238125" y="141852"/>
-                </a:lnTo>
-                <a:lnTo>
-                  <a:pt x="317500" y="186035"/>
-                </a:lnTo>
-                <a:lnTo>
-                  <a:pt x="396875" y="228668"/>
-                </a:lnTo>
-                <a:lnTo>
-                  <a:pt x="476250" y="269751"/>
-                </a:lnTo>
-                <a:lnTo>
-                  <a:pt x="555625" y="309283"/>
-                </a:lnTo>
-                <a:lnTo>
-                  <a:pt x="635000" y="347266"/>
-                </a:lnTo>
-                <a:lnTo>
-                  <a:pt x="714375" y="383698"/>
-                </a:lnTo>
-                <a:lnTo>
-                  <a:pt x="793750" y="418579"/>
-                </a:lnTo>
-                <a:lnTo>
-                  <a:pt x="873125" y="451910"/>
-                </a:lnTo>
-                <a:lnTo>
-                  <a:pt x="952500" y="483691"/>
-                </a:lnTo>
-                <a:lnTo>
-                  <a:pt x="1031875" y="513922"/>
-                </a:lnTo>
-                <a:lnTo>
-                  <a:pt x="1111250" y="542603"/>
-                </a:lnTo>
-                <a:lnTo>
-                  <a:pt x="1190625" y="569733"/>
-                </a:lnTo>
-                <a:lnTo>
-                  <a:pt x="1270000" y="595312"/>
-                </a:lnTo>
-                <a:lnTo>
-                  <a:pt x="1349375" y="619342"/>
-                </a:lnTo>
-                <a:lnTo>
-                  <a:pt x="1428750" y="641821"/>
-                </a:lnTo>
-                <a:lnTo>
-                  <a:pt x="1508125" y="662750"/>
-                </a:lnTo>
-                <a:lnTo>
-                  <a:pt x="1587500" y="682129"/>
-                </a:lnTo>
-                <a:lnTo>
-                  <a:pt x="1666875" y="699957"/>
-                </a:lnTo>
-                <a:lnTo>
-                  <a:pt x="1746250" y="716235"/>
-                </a:lnTo>
-                <a:lnTo>
-                  <a:pt x="1825625" y="730963"/>
-                </a:lnTo>
-                <a:lnTo>
-                  <a:pt x="1905000" y="744141"/>
-                </a:lnTo>
-                <a:lnTo>
-                  <a:pt x="1984375" y="755768"/>
-                </a:lnTo>
-                <a:lnTo>
-                  <a:pt x="2063750" y="765845"/>
-                </a:lnTo>
-                <a:lnTo>
-                  <a:pt x="2143125" y="774371"/>
-                </a:lnTo>
-                <a:lnTo>
-                  <a:pt x="2222500" y="781348"/>
-                </a:lnTo>
-                <a:lnTo>
-                  <a:pt x="2301875" y="786774"/>
-                </a:lnTo>
-                <a:lnTo>
-                  <a:pt x="2381250" y="790649"/>
-                </a:lnTo>
-                <a:lnTo>
-                  <a:pt x="2460625" y="792975"/>
-                </a:lnTo>
-                <a:lnTo>
-                  <a:pt x="2540000" y="793750"/>
-                </a:lnTo>
-                <a:lnTo>
-                  <a:pt x="2619375" y="792975"/>
-                </a:lnTo>
-                <a:lnTo>
-                  <a:pt x="2698750" y="790649"/>
-                </a:lnTo>
-                <a:lnTo>
-                  <a:pt x="2778125" y="786774"/>
-                </a:lnTo>
-                <a:lnTo>
-                  <a:pt x="2857500" y="781348"/>
-                </a:lnTo>
-                <a:lnTo>
-                  <a:pt x="2936875" y="774371"/>
-                </a:lnTo>
-                <a:lnTo>
-                  <a:pt x="3016250" y="765845"/>
-                </a:lnTo>
-                <a:lnTo>
-                  <a:pt x="3095625" y="755768"/>
-                </a:lnTo>
-                <a:lnTo>
-                  <a:pt x="3175000" y="744141"/>
-                </a:lnTo>
-                <a:lnTo>
-                  <a:pt x="3254375" y="730963"/>
-                </a:lnTo>
-                <a:lnTo>
-                  <a:pt x="3333750" y="716235"/>
-                </a:lnTo>
-                <a:lnTo>
-                  <a:pt x="3413125" y="699957"/>
-                </a:lnTo>
-                <a:lnTo>
-                  <a:pt x="3492500" y="682129"/>
-                </a:lnTo>
-                <a:lnTo>
-                  <a:pt x="3571875" y="662750"/>
-                </a:lnTo>
-                <a:lnTo>
-                  <a:pt x="3651250" y="641821"/>
-                </a:lnTo>
-                <a:lnTo>
-                  <a:pt x="3730625" y="619342"/>
-                </a:lnTo>
-                <a:lnTo>
-                  <a:pt x="3810000" y="595312"/>
-                </a:lnTo>
-                <a:lnTo>
-                  <a:pt x="3889375" y="569733"/>
-                </a:lnTo>
-                <a:lnTo>
-                  <a:pt x="3968750" y="542603"/>
-                </a:lnTo>
-                <a:lnTo>
-                  <a:pt x="4048125" y="513922"/>
-                </a:lnTo>
-                <a:lnTo>
-                  <a:pt x="4127500" y="483691"/>
-                </a:lnTo>
-                <a:lnTo>
-                  <a:pt x="4206875" y="451910"/>
-                </a:lnTo>
-                <a:lnTo>
-                  <a:pt x="4286250" y="418579"/>
-                </a:lnTo>
-                <a:lnTo>
-                  <a:pt x="4365625" y="383698"/>
-                </a:lnTo>
-                <a:lnTo>
-                  <a:pt x="4445000" y="347266"/>
-                </a:lnTo>
-                <a:lnTo>
-                  <a:pt x="4524375" y="309283"/>
-                </a:lnTo>
-                <a:lnTo>
-                  <a:pt x="4603750" y="269751"/>
-                </a:lnTo>
-                <a:lnTo>
-                  <a:pt x="4683125" y="228668"/>
-                </a:lnTo>
-                <a:lnTo>
-                  <a:pt x="4762500" y="186035"/>
-                </a:lnTo>
-                <a:lnTo>
-                  <a:pt x="4841875" y="141852"/>
-                </a:lnTo>
-                <a:lnTo>
-                  <a:pt x="4921250" y="96118"/>
-                </a:lnTo>
-                <a:lnTo>
-                  <a:pt x="5000625" y="48834"/>
-                </a:lnTo>
-                <a:lnTo>
-                  <a:pt x="5080000" y="0"/>
-                </a:lnTo>
-              </a:path>
-            </a:pathLst>
-          </a:custGeom>
-          <a:noFill/>
-          <a:ln w="50800" cap="rnd">
-            <a:solidFill>
-              <a:srgbClr val="F26A1B"/>
-            </a:solidFill>
-            <a:round/>
-          </a:ln>
-        </p:spPr>
-        <p:txBody>
-          <a:bodyPr rtlCol="0" anchor="ctr"/>
-          <a:lstStyle/>
-          <a:p>
-            <a:pPr algn="ctr"/>
-          </a:p>
-        </p:txBody>
-      </p:sp>
-      <p:sp>
-        <p:nvSpPr>
-          <p:cNvPr id="5" name="図・線4"/>
-          <p:cNvSpPr/>
-          <p:nvPr/>
-        </p:nvSpPr>
-        <p:spPr>
-          <a:xfrm>
-            <a:off x="8636000" y="4381500"/>
-            <a:ext cx="1016000" cy="0"/>
-          </a:xfrm>
-          <a:custGeom>
-            <a:avLst/>
-            <a:gdLst/>
-            <a:ahLst/>
-            <a:cxnLst/>
-            <a:rect l="l" t="t" r="r" b="b"/>
-            <a:pathLst>
-              <a:path w="1016000" h="0">
-                <a:moveTo>
-                  <a:pt x="0" y="0"/>
-                </a:moveTo>
-                <a:lnTo>
-                  <a:pt x="1016000" y="0"/>
-                </a:lnTo>
-              </a:path>
-            </a:pathLst>
-          </a:custGeom>
-          <a:noFill/>
-          <a:ln w="38100" cap="rnd">
-            <a:solidFill>
-              <a:srgbClr val="FFFFFF"/>
-            </a:solidFill>
-            <a:round/>
-          </a:ln>
-        </p:spPr>
-        <p:txBody>
-          <a:bodyPr rtlCol="0" anchor="ctr"/>
-          <a:lstStyle/>
-          <a:p>
-            <a:pPr algn="ctr"/>
-          </a:p>
-        </p:txBody>
-      </p:sp>
-      <p:sp>
-        <p:nvSpPr>
-          <p:cNvPr id="6" name="図・点"/>
-          <p:cNvSpPr/>
-          <p:nvPr/>
-        </p:nvSpPr>
-        <p:spPr>
-          <a:xfrm>
-            <a:off x="2432050" y="4273550"/>
-            <a:ext cx="215900" cy="215900"/>
-          </a:xfrm>
-          <a:prstGeom prst="ellipse">
-            <a:avLst/>
-          </a:prstGeom>
-          <a:solidFill>
-            <a:srgbClr val="FFFFFF"/>
-          </a:solidFill>
-          <a:ln>
-            <a:noFill/>
-          </a:ln>
-        </p:spPr>
-        <p:txBody>
-          <a:bodyPr rtlCol="0" anchor="ctr"/>
-          <a:lstStyle/>
-          <a:p>
-            <a:pPr algn="ctr"/>
-          </a:p>
-        </p:txBody>
-      </p:sp>
-      <p:sp>
-        <p:nvSpPr>
-          <p:cNvPr id="7" name="図・点"/>
-          <p:cNvSpPr/>
-          <p:nvPr/>
-        </p:nvSpPr>
-        <p:spPr>
-          <a:xfrm>
-            <a:off x="9544050" y="4273550"/>
-            <a:ext cx="215900" cy="215900"/>
-          </a:xfrm>
-          <a:prstGeom prst="ellipse">
-            <a:avLst/>
-          </a:prstGeom>
-          <a:solidFill>
-            <a:srgbClr val="FFFFFF"/>
-          </a:solidFill>
-          <a:ln>
-            <a:noFill/>
-          </a:ln>
-        </p:spPr>
-        <p:txBody>
-          <a:bodyPr rtlCol="0" anchor="ctr"/>
-          <a:lstStyle/>
-          <a:p>
-            <a:pPr algn="ctr"/>
-          </a:p>
-        </p:txBody>
-      </p:sp>
-      <p:sp>
-        <p:nvSpPr>
-          <p:cNvPr id="8" name="図・ラベル"/>
-          <p:cNvSpPr txBox="1"/>
-          <p:nvPr/>
-        </p:nvSpPr>
-        <p:spPr>
-          <a:xfrm>
-            <a:off x="-3175000" y="3634740"/>
-            <a:ext cx="11430000" cy="432816"/>
+            <a:off x="450850" y="2346008"/>
+            <a:ext cx="9107984" cy="2055812"/>
           </a:xfrm>
           <a:prstGeom prst="rect">
             <a:avLst/>
@@ -5360,9 +4977,9 @@
           <a:bodyPr wrap="none" lIns="0" rIns="0" tIns="0" bIns="0" anchor="t"/>
           <a:lstStyle/>
           <a:p>
-            <a:pPr algn="ctr">
+            <a:pPr algn="l">
               <a:lnSpc>
-                <a:spcPts val="3408"/>
+                <a:spcPts val="8093"/>
               </a:lnSpc>
               <a:spcBef>
                 <a:spcPts val="0"/>
@@ -5372,7 +4989,7 @@
               </a:spcAft>
             </a:pPr>
             <a:r>
-              <a:rPr sz="2400" b="0" spc="-24" lang="ja-JP" altLang="en-US">
+              <a:rPr sz="5699" b="0" spc="-57" lang="ja-JP" altLang="en-US">
                 <a:solidFill>
                   <a:srgbClr val="FFFFFF"/>
                 </a:solidFill>
@@ -5380,34 +4997,13 @@
                 <a:ea typeface="Noto Sans JP Medium"/>
                 <a:cs typeface="Noto Sans JP Medium"/>
               </a:rPr>
-              <a:t>ホテル</a:t>
-            </a:r>
-          </a:p>
-        </p:txBody>
-      </p:sp>
-      <p:sp>
-        <p:nvSpPr>
-          <p:cNvPr id="9" name="図・ラベル"/>
-          <p:cNvSpPr txBox="1"/>
-          <p:nvPr/>
-        </p:nvSpPr>
-        <p:spPr>
-          <a:xfrm>
-            <a:off x="-3175000" y="4583112"/>
-            <a:ext cx="11430000" cy="270510"/>
-          </a:xfrm>
-          <a:prstGeom prst="rect">
-            <a:avLst/>
-          </a:prstGeom>
-          <a:noFill/>
-        </p:spPr>
-        <p:txBody>
-          <a:bodyPr wrap="none" lIns="0" rIns="0" tIns="0" bIns="0" anchor="t"/>
-          <a:lstStyle/>
-          <a:p>
-            <a:pPr algn="ctr">
+              <a:t>「配送できる」だけでは、</a:t>
+            </a:r>
+          </a:p>
+          <a:p>
+            <a:pPr algn="l" marL="361950">
               <a:lnSpc>
-                <a:spcPts val="2129"/>
+                <a:spcPts val="8093"/>
               </a:lnSpc>
               <a:spcBef>
                 <a:spcPts val="0"/>
@@ -5417,52 +5013,7 @@
               </a:spcAft>
             </a:pPr>
             <a:r>
-              <a:rPr sz="1500" b="0" spc="-15" lang="ja-JP" altLang="en-US">
-                <a:solidFill>
-                  <a:srgbClr val="A3A3A3"/>
-                </a:solidFill>
-                <a:latin typeface="Noto Sans JP"/>
-                <a:ea typeface="Noto Sans JP"/>
-                <a:cs typeface="Noto Sans JP"/>
-              </a:rPr>
-              <a:t>チェックアウトで預ける</a:t>
-            </a:r>
-          </a:p>
-        </p:txBody>
-      </p:sp>
-      <p:sp>
-        <p:nvSpPr>
-          <p:cNvPr id="10" name="図・ラベル"/>
-          <p:cNvSpPr txBox="1"/>
-          <p:nvPr/>
-        </p:nvSpPr>
-        <p:spPr>
-          <a:xfrm>
-            <a:off x="3937000" y="3634740"/>
-            <a:ext cx="11430000" cy="432816"/>
-          </a:xfrm>
-          <a:prstGeom prst="rect">
-            <a:avLst/>
-          </a:prstGeom>
-          <a:noFill/>
-        </p:spPr>
-        <p:txBody>
-          <a:bodyPr wrap="none" lIns="0" rIns="0" tIns="0" bIns="0" anchor="t"/>
-          <a:lstStyle/>
-          <a:p>
-            <a:pPr algn="ctr">
-              <a:lnSpc>
-                <a:spcPts val="3408"/>
-              </a:lnSpc>
-              <a:spcBef>
-                <a:spcPts val="0"/>
-              </a:spcBef>
-              <a:spcAft>
-                <a:spcPts val="0"/>
-              </a:spcAft>
-            </a:pPr>
-            <a:r>
-              <a:rPr sz="2400" b="0" spc="-24" lang="ja-JP" altLang="en-US">
+              <a:rPr sz="5699" b="0" spc="-57" lang="ja-JP" altLang="en-US">
                 <a:solidFill>
                   <a:srgbClr val="FFFFFF"/>
                 </a:solidFill>
@@ -5470,256 +5021,7 @@
                 <a:ea typeface="Noto Sans JP Medium"/>
                 <a:cs typeface="Noto Sans JP Medium"/>
               </a:rPr>
-              <a:t>次のホテル</a:t>
-            </a:r>
-          </a:p>
-        </p:txBody>
-      </p:sp>
-      <p:sp>
-        <p:nvSpPr>
-          <p:cNvPr id="11" name="図・ラベル"/>
-          <p:cNvSpPr txBox="1"/>
-          <p:nvPr/>
-        </p:nvSpPr>
-        <p:spPr>
-          <a:xfrm>
-            <a:off x="3937000" y="4583112"/>
-            <a:ext cx="11430000" cy="270510"/>
-          </a:xfrm>
-          <a:prstGeom prst="rect">
-            <a:avLst/>
-          </a:prstGeom>
-          <a:noFill/>
-        </p:spPr>
-        <p:txBody>
-          <a:bodyPr wrap="none" lIns="0" rIns="0" tIns="0" bIns="0" anchor="t"/>
-          <a:lstStyle/>
-          <a:p>
-            <a:pPr algn="ctr">
-              <a:lnSpc>
-                <a:spcPts val="2129"/>
-              </a:lnSpc>
-              <a:spcBef>
-                <a:spcPts val="0"/>
-              </a:spcBef>
-              <a:spcAft>
-                <a:spcPts val="0"/>
-              </a:spcAft>
-            </a:pPr>
-            <a:r>
-              <a:rPr sz="1500" b="0" spc="-15" lang="ja-JP" altLang="en-US">
-                <a:solidFill>
-                  <a:srgbClr val="A3A3A3"/>
-                </a:solidFill>
-                <a:latin typeface="Noto Sans JP"/>
-                <a:ea typeface="Noto Sans JP"/>
-                <a:cs typeface="Noto Sans JP"/>
-              </a:rPr>
-              <a:t>先に届いている</a:t>
-            </a:r>
-          </a:p>
-        </p:txBody>
-      </p:sp>
-      <p:sp>
-        <p:nvSpPr>
-          <p:cNvPr id="12" name="図・ラベル"/>
-          <p:cNvSpPr txBox="1"/>
-          <p:nvPr/>
-        </p:nvSpPr>
-        <p:spPr>
-          <a:xfrm>
-            <a:off x="381000" y="3047048"/>
-            <a:ext cx="11430000" cy="378714"/>
-          </a:xfrm>
-          <a:prstGeom prst="rect">
-            <a:avLst/>
-          </a:prstGeom>
-          <a:noFill/>
-        </p:spPr>
-        <p:txBody>
-          <a:bodyPr wrap="none" lIns="0" rIns="0" tIns="0" bIns="0" anchor="t"/>
-          <a:lstStyle/>
-          <a:p>
-            <a:pPr algn="ctr">
-              <a:lnSpc>
-                <a:spcPts val="2982"/>
-              </a:lnSpc>
-              <a:spcBef>
-                <a:spcPts val="0"/>
-              </a:spcBef>
-              <a:spcAft>
-                <a:spcPts val="0"/>
-              </a:spcAft>
-            </a:pPr>
-            <a:r>
-              <a:rPr sz="2100" b="0" spc="-21" lang="ja-JP" altLang="en-US">
-                <a:solidFill>
-                  <a:srgbClr val="FFFFFF"/>
-                </a:solidFill>
-                <a:latin typeface="Noto Sans JP Medium"/>
-                <a:ea typeface="Noto Sans JP Medium"/>
-                <a:cs typeface="Noto Sans JP Medium"/>
-              </a:rPr>
-              <a:t>人は、身軽に観光へ。</a:t>
-            </a:r>
-          </a:p>
-        </p:txBody>
-      </p:sp>
-      <p:sp>
-        <p:nvSpPr>
-          <p:cNvPr id="13" name="図・ラベル"/>
-          <p:cNvSpPr txBox="1"/>
-          <p:nvPr/>
-        </p:nvSpPr>
-        <p:spPr>
-          <a:xfrm>
-            <a:off x="381000" y="5326698"/>
-            <a:ext cx="11430000" cy="378714"/>
-          </a:xfrm>
-          <a:prstGeom prst="rect">
-            <a:avLst/>
-          </a:prstGeom>
-          <a:noFill/>
-        </p:spPr>
-        <p:txBody>
-          <a:bodyPr wrap="none" lIns="0" rIns="0" tIns="0" bIns="0" anchor="t"/>
-          <a:lstStyle/>
-          <a:p>
-            <a:pPr algn="ctr">
-              <a:lnSpc>
-                <a:spcPts val="2982"/>
-              </a:lnSpc>
-              <a:spcBef>
-                <a:spcPts val="0"/>
-              </a:spcBef>
-              <a:spcAft>
-                <a:spcPts val="0"/>
-              </a:spcAft>
-            </a:pPr>
-            <a:r>
-              <a:rPr sz="2100" b="0" spc="-21" lang="ja-JP" altLang="en-US">
-                <a:solidFill>
-                  <a:srgbClr val="F26A1B"/>
-                </a:solidFill>
-                <a:latin typeface="Noto Sans JP Medium"/>
-                <a:ea typeface="Noto Sans JP Medium"/>
-                <a:cs typeface="Noto Sans JP Medium"/>
-              </a:rPr>
-              <a:t>荷物は、今ある物流で。</a:t>
-            </a:r>
-          </a:p>
-        </p:txBody>
-      </p:sp>
-      <p:sp>
-        <p:nvSpPr>
-          <p:cNvPr id="14" name="図・ラベル"/>
-          <p:cNvSpPr txBox="1"/>
-          <p:nvPr/>
-        </p:nvSpPr>
-        <p:spPr>
-          <a:xfrm>
-            <a:off x="381000" y="5776912"/>
-            <a:ext cx="11430000" cy="270510"/>
-          </a:xfrm>
-          <a:prstGeom prst="rect">
-            <a:avLst/>
-          </a:prstGeom>
-          <a:noFill/>
-        </p:spPr>
-        <p:txBody>
-          <a:bodyPr wrap="none" lIns="0" rIns="0" tIns="0" bIns="0" anchor="t"/>
-          <a:lstStyle/>
-          <a:p>
-            <a:pPr algn="ctr">
-              <a:lnSpc>
-                <a:spcPts val="2129"/>
-              </a:lnSpc>
-              <a:spcBef>
-                <a:spcPts val="0"/>
-              </a:spcBef>
-              <a:spcAft>
-                <a:spcPts val="0"/>
-              </a:spcAft>
-            </a:pPr>
-            <a:r>
-              <a:rPr sz="1500" b="0" spc="-15" lang="ja-JP" altLang="en-US">
-                <a:solidFill>
-                  <a:srgbClr val="A3A3A3"/>
-                </a:solidFill>
-                <a:latin typeface="Noto Sans JP"/>
-                <a:ea typeface="Noto Sans JP"/>
-                <a:cs typeface="Noto Sans JP"/>
-              </a:rPr>
-              <a:t>旅行会社・DMCからの依頼を受けて、BondExが手配します</a:t>
-            </a:r>
-          </a:p>
-        </p:txBody>
-      </p:sp>
-      <p:sp>
-        <p:nvSpPr>
-          <p:cNvPr id="15" name="見出し"/>
-          <p:cNvSpPr txBox="1"/>
-          <p:nvPr/>
-        </p:nvSpPr>
-        <p:spPr>
-          <a:xfrm>
-            <a:off x="812800" y="692785"/>
-            <a:ext cx="6583759" cy="1658938"/>
-          </a:xfrm>
-          <a:prstGeom prst="rect">
-            <a:avLst/>
-          </a:prstGeom>
-          <a:noFill/>
-        </p:spPr>
-        <p:txBody>
-          <a:bodyPr wrap="none" lIns="0" rIns="0" tIns="0" bIns="0" anchor="t"/>
-          <a:lstStyle/>
-          <a:p>
-            <a:pPr algn="l">
-              <a:lnSpc>
-                <a:spcPts val="6531"/>
-              </a:lnSpc>
-              <a:spcBef>
-                <a:spcPts val="0"/>
-              </a:spcBef>
-              <a:spcAft>
-                <a:spcPts val="0"/>
-              </a:spcAft>
-            </a:pPr>
-            <a:r>
-              <a:rPr sz="4600" b="0" spc="-46" lang="ja-JP" altLang="en-US">
-                <a:solidFill>
-                  <a:srgbClr val="FFFFFF"/>
-                </a:solidFill>
-                <a:latin typeface="Noto Sans JP Medium"/>
-                <a:ea typeface="Noto Sans JP Medium"/>
-                <a:cs typeface="Noto Sans JP Medium"/>
-              </a:rPr>
-              <a:t>荷物を手放す場所を、</a:t>
-            </a:r>
-          </a:p>
-          <a:p>
-            <a:pPr algn="l">
-              <a:lnSpc>
-                <a:spcPts val="6531"/>
-              </a:lnSpc>
-              <a:spcBef>
-                <a:spcPts val="0"/>
-              </a:spcBef>
-              <a:spcAft>
-                <a:spcPts val="0"/>
-              </a:spcAft>
-            </a:pPr>
-            <a:r>
-              <a:rPr sz="4600" b="0" spc="-46" lang="ja-JP" altLang="en-US">
-                <a:solidFill>
-                  <a:srgbClr val="FFFFFF"/>
-                </a:solidFill>
-                <a:latin typeface="Noto Sans JP Medium"/>
-                <a:ea typeface="Noto Sans JP Medium"/>
-                <a:cs typeface="Noto Sans JP Medium"/>
-              </a:rPr>
-              <a:t>旅の中に。</a:t>
+              <a:t>使われない。</a:t>
             </a:r>
           </a:p>
         </p:txBody>
@@ -5752,14 +5054,631 @@
       <p:grpSpPr/>
       <p:sp>
         <p:nvSpPr>
-          <p:cNvPr id="2" name="見出し"/>
+          <p:cNvPr id="2" name="図・線1"/>
+          <p:cNvSpPr/>
+          <p:nvPr/>
+        </p:nvSpPr>
+        <p:spPr>
+          <a:xfrm>
+            <a:off x="2540000" y="4381500"/>
+            <a:ext cx="1016000" cy="0"/>
+          </a:xfrm>
+          <a:custGeom>
+            <a:avLst/>
+            <a:gdLst/>
+            <a:ahLst/>
+            <a:cxnLst/>
+            <a:rect l="l" t="t" r="r" b="b"/>
+            <a:pathLst>
+              <a:path w="1016000" h="0">
+                <a:moveTo>
+                  <a:pt x="0" y="0"/>
+                </a:moveTo>
+                <a:lnTo>
+                  <a:pt x="1016000" y="0"/>
+                </a:lnTo>
+              </a:path>
+            </a:pathLst>
+          </a:custGeom>
+          <a:noFill/>
+          <a:ln w="38100" cap="rnd">
+            <a:solidFill>
+              <a:srgbClr val="FFFFFF"/>
+            </a:solidFill>
+            <a:round/>
+          </a:ln>
+        </p:spPr>
+        <p:txBody>
+          <a:bodyPr rtlCol="0" anchor="ctr"/>
+          <a:lstStyle/>
+          <a:p>
+            <a:pPr algn="ctr"/>
+          </a:p>
+        </p:txBody>
+      </p:sp>
+      <p:sp>
+        <p:nvSpPr>
+          <p:cNvPr id="3" name="図・線2"/>
+          <p:cNvSpPr/>
+          <p:nvPr/>
+        </p:nvSpPr>
+        <p:spPr>
+          <a:xfrm>
+            <a:off x="3556000" y="3587750"/>
+            <a:ext cx="5080000" cy="793750"/>
+          </a:xfrm>
+          <a:custGeom>
+            <a:avLst/>
+            <a:gdLst/>
+            <a:ahLst/>
+            <a:cxnLst/>
+            <a:rect l="l" t="t" r="r" b="b"/>
+            <a:pathLst>
+              <a:path w="5080000" h="793750">
+                <a:moveTo>
+                  <a:pt x="0" y="793750"/>
+                </a:moveTo>
+                <a:lnTo>
+                  <a:pt x="79375" y="744916"/>
+                </a:lnTo>
+                <a:lnTo>
+                  <a:pt x="158750" y="697632"/>
+                </a:lnTo>
+                <a:lnTo>
+                  <a:pt x="238125" y="651898"/>
+                </a:lnTo>
+                <a:lnTo>
+                  <a:pt x="317500" y="607715"/>
+                </a:lnTo>
+                <a:lnTo>
+                  <a:pt x="396875" y="565082"/>
+                </a:lnTo>
+                <a:lnTo>
+                  <a:pt x="476250" y="523999"/>
+                </a:lnTo>
+                <a:lnTo>
+                  <a:pt x="555625" y="484467"/>
+                </a:lnTo>
+                <a:lnTo>
+                  <a:pt x="635000" y="446484"/>
+                </a:lnTo>
+                <a:lnTo>
+                  <a:pt x="714375" y="410052"/>
+                </a:lnTo>
+                <a:lnTo>
+                  <a:pt x="793750" y="375171"/>
+                </a:lnTo>
+                <a:lnTo>
+                  <a:pt x="873125" y="341840"/>
+                </a:lnTo>
+                <a:lnTo>
+                  <a:pt x="952500" y="310059"/>
+                </a:lnTo>
+                <a:lnTo>
+                  <a:pt x="1031875" y="279828"/>
+                </a:lnTo>
+                <a:lnTo>
+                  <a:pt x="1111250" y="251147"/>
+                </a:lnTo>
+                <a:lnTo>
+                  <a:pt x="1190625" y="224017"/>
+                </a:lnTo>
+                <a:lnTo>
+                  <a:pt x="1270000" y="198438"/>
+                </a:lnTo>
+                <a:lnTo>
+                  <a:pt x="1349375" y="174408"/>
+                </a:lnTo>
+                <a:lnTo>
+                  <a:pt x="1428750" y="151929"/>
+                </a:lnTo>
+                <a:lnTo>
+                  <a:pt x="1508125" y="131000"/>
+                </a:lnTo>
+                <a:lnTo>
+                  <a:pt x="1587500" y="111621"/>
+                </a:lnTo>
+                <a:lnTo>
+                  <a:pt x="1666875" y="93793"/>
+                </a:lnTo>
+                <a:lnTo>
+                  <a:pt x="1746250" y="77515"/>
+                </a:lnTo>
+                <a:lnTo>
+                  <a:pt x="1825625" y="62787"/>
+                </a:lnTo>
+                <a:lnTo>
+                  <a:pt x="1905000" y="49609"/>
+                </a:lnTo>
+                <a:lnTo>
+                  <a:pt x="1984375" y="37982"/>
+                </a:lnTo>
+                <a:lnTo>
+                  <a:pt x="2063750" y="27905"/>
+                </a:lnTo>
+                <a:lnTo>
+                  <a:pt x="2143125" y="19379"/>
+                </a:lnTo>
+                <a:lnTo>
+                  <a:pt x="2222500" y="12402"/>
+                </a:lnTo>
+                <a:lnTo>
+                  <a:pt x="2301875" y="6976"/>
+                </a:lnTo>
+                <a:lnTo>
+                  <a:pt x="2381250" y="3101"/>
+                </a:lnTo>
+                <a:lnTo>
+                  <a:pt x="2460625" y="775"/>
+                </a:lnTo>
+                <a:lnTo>
+                  <a:pt x="2540000" y="0"/>
+                </a:lnTo>
+                <a:lnTo>
+                  <a:pt x="2619375" y="775"/>
+                </a:lnTo>
+                <a:lnTo>
+                  <a:pt x="2698750" y="3101"/>
+                </a:lnTo>
+                <a:lnTo>
+                  <a:pt x="2778125" y="6976"/>
+                </a:lnTo>
+                <a:lnTo>
+                  <a:pt x="2857500" y="12402"/>
+                </a:lnTo>
+                <a:lnTo>
+                  <a:pt x="2936875" y="19379"/>
+                </a:lnTo>
+                <a:lnTo>
+                  <a:pt x="3016250" y="27905"/>
+                </a:lnTo>
+                <a:lnTo>
+                  <a:pt x="3095625" y="37982"/>
+                </a:lnTo>
+                <a:lnTo>
+                  <a:pt x="3175000" y="49609"/>
+                </a:lnTo>
+                <a:lnTo>
+                  <a:pt x="3254375" y="62787"/>
+                </a:lnTo>
+                <a:lnTo>
+                  <a:pt x="3333750" y="77515"/>
+                </a:lnTo>
+                <a:lnTo>
+                  <a:pt x="3413125" y="93793"/>
+                </a:lnTo>
+                <a:lnTo>
+                  <a:pt x="3492500" y="111621"/>
+                </a:lnTo>
+                <a:lnTo>
+                  <a:pt x="3571875" y="131000"/>
+                </a:lnTo>
+                <a:lnTo>
+                  <a:pt x="3651250" y="151929"/>
+                </a:lnTo>
+                <a:lnTo>
+                  <a:pt x="3730625" y="174408"/>
+                </a:lnTo>
+                <a:lnTo>
+                  <a:pt x="3810000" y="198438"/>
+                </a:lnTo>
+                <a:lnTo>
+                  <a:pt x="3889375" y="224017"/>
+                </a:lnTo>
+                <a:lnTo>
+                  <a:pt x="3968750" y="251147"/>
+                </a:lnTo>
+                <a:lnTo>
+                  <a:pt x="4048125" y="279828"/>
+                </a:lnTo>
+                <a:lnTo>
+                  <a:pt x="4127500" y="310059"/>
+                </a:lnTo>
+                <a:lnTo>
+                  <a:pt x="4206875" y="341840"/>
+                </a:lnTo>
+                <a:lnTo>
+                  <a:pt x="4286250" y="375171"/>
+                </a:lnTo>
+                <a:lnTo>
+                  <a:pt x="4365625" y="410052"/>
+                </a:lnTo>
+                <a:lnTo>
+                  <a:pt x="4445000" y="446484"/>
+                </a:lnTo>
+                <a:lnTo>
+                  <a:pt x="4524375" y="484467"/>
+                </a:lnTo>
+                <a:lnTo>
+                  <a:pt x="4603750" y="523999"/>
+                </a:lnTo>
+                <a:lnTo>
+                  <a:pt x="4683125" y="565082"/>
+                </a:lnTo>
+                <a:lnTo>
+                  <a:pt x="4762500" y="607715"/>
+                </a:lnTo>
+                <a:lnTo>
+                  <a:pt x="4841875" y="651898"/>
+                </a:lnTo>
+                <a:lnTo>
+                  <a:pt x="4921250" y="697632"/>
+                </a:lnTo>
+                <a:lnTo>
+                  <a:pt x="5000625" y="744916"/>
+                </a:lnTo>
+                <a:lnTo>
+                  <a:pt x="5080000" y="793750"/>
+                </a:lnTo>
+              </a:path>
+            </a:pathLst>
+          </a:custGeom>
+          <a:noFill/>
+          <a:ln w="31750" cap="rnd">
+            <a:solidFill>
+              <a:srgbClr val="FFFFFF">
+                <a:alpha val="85000"/>
+              </a:srgbClr>
+            </a:solidFill>
+            <a:custDash>
+              <a:ds d="20000" sp="320000"/>
+            </a:custDash>
+            <a:round/>
+          </a:ln>
+        </p:spPr>
+        <p:txBody>
+          <a:bodyPr rtlCol="0" anchor="ctr"/>
+          <a:lstStyle/>
+          <a:p>
+            <a:pPr algn="ctr"/>
+          </a:p>
+        </p:txBody>
+      </p:sp>
+      <p:sp>
+        <p:nvSpPr>
+          <p:cNvPr id="4" name="図・線3"/>
+          <p:cNvSpPr/>
+          <p:nvPr/>
+        </p:nvSpPr>
+        <p:spPr>
+          <a:xfrm>
+            <a:off x="3556000" y="4381500"/>
+            <a:ext cx="5080000" cy="793750"/>
+          </a:xfrm>
+          <a:custGeom>
+            <a:avLst/>
+            <a:gdLst/>
+            <a:ahLst/>
+            <a:cxnLst/>
+            <a:rect l="l" t="t" r="r" b="b"/>
+            <a:pathLst>
+              <a:path w="5080000" h="793750">
+                <a:moveTo>
+                  <a:pt x="0" y="0"/>
+                </a:moveTo>
+                <a:lnTo>
+                  <a:pt x="79375" y="48834"/>
+                </a:lnTo>
+                <a:lnTo>
+                  <a:pt x="158750" y="96118"/>
+                </a:lnTo>
+                <a:lnTo>
+                  <a:pt x="238125" y="141852"/>
+                </a:lnTo>
+                <a:lnTo>
+                  <a:pt x="317500" y="186035"/>
+                </a:lnTo>
+                <a:lnTo>
+                  <a:pt x="396875" y="228668"/>
+                </a:lnTo>
+                <a:lnTo>
+                  <a:pt x="476250" y="269751"/>
+                </a:lnTo>
+                <a:lnTo>
+                  <a:pt x="555625" y="309283"/>
+                </a:lnTo>
+                <a:lnTo>
+                  <a:pt x="635000" y="347266"/>
+                </a:lnTo>
+                <a:lnTo>
+                  <a:pt x="714375" y="383698"/>
+                </a:lnTo>
+                <a:lnTo>
+                  <a:pt x="793750" y="418579"/>
+                </a:lnTo>
+                <a:lnTo>
+                  <a:pt x="873125" y="451910"/>
+                </a:lnTo>
+                <a:lnTo>
+                  <a:pt x="952500" y="483691"/>
+                </a:lnTo>
+                <a:lnTo>
+                  <a:pt x="1031875" y="513922"/>
+                </a:lnTo>
+                <a:lnTo>
+                  <a:pt x="1111250" y="542603"/>
+                </a:lnTo>
+                <a:lnTo>
+                  <a:pt x="1190625" y="569733"/>
+                </a:lnTo>
+                <a:lnTo>
+                  <a:pt x="1270000" y="595312"/>
+                </a:lnTo>
+                <a:lnTo>
+                  <a:pt x="1349375" y="619342"/>
+                </a:lnTo>
+                <a:lnTo>
+                  <a:pt x="1428750" y="641821"/>
+                </a:lnTo>
+                <a:lnTo>
+                  <a:pt x="1508125" y="662750"/>
+                </a:lnTo>
+                <a:lnTo>
+                  <a:pt x="1587500" y="682129"/>
+                </a:lnTo>
+                <a:lnTo>
+                  <a:pt x="1666875" y="699957"/>
+                </a:lnTo>
+                <a:lnTo>
+                  <a:pt x="1746250" y="716235"/>
+                </a:lnTo>
+                <a:lnTo>
+                  <a:pt x="1825625" y="730963"/>
+                </a:lnTo>
+                <a:lnTo>
+                  <a:pt x="1905000" y="744141"/>
+                </a:lnTo>
+                <a:lnTo>
+                  <a:pt x="1984375" y="755768"/>
+                </a:lnTo>
+                <a:lnTo>
+                  <a:pt x="2063750" y="765845"/>
+                </a:lnTo>
+                <a:lnTo>
+                  <a:pt x="2143125" y="774371"/>
+                </a:lnTo>
+                <a:lnTo>
+                  <a:pt x="2222500" y="781348"/>
+                </a:lnTo>
+                <a:lnTo>
+                  <a:pt x="2301875" y="786774"/>
+                </a:lnTo>
+                <a:lnTo>
+                  <a:pt x="2381250" y="790649"/>
+                </a:lnTo>
+                <a:lnTo>
+                  <a:pt x="2460625" y="792975"/>
+                </a:lnTo>
+                <a:lnTo>
+                  <a:pt x="2540000" y="793750"/>
+                </a:lnTo>
+                <a:lnTo>
+                  <a:pt x="2619375" y="792975"/>
+                </a:lnTo>
+                <a:lnTo>
+                  <a:pt x="2698750" y="790649"/>
+                </a:lnTo>
+                <a:lnTo>
+                  <a:pt x="2778125" y="786774"/>
+                </a:lnTo>
+                <a:lnTo>
+                  <a:pt x="2857500" y="781348"/>
+                </a:lnTo>
+                <a:lnTo>
+                  <a:pt x="2936875" y="774371"/>
+                </a:lnTo>
+                <a:lnTo>
+                  <a:pt x="3016250" y="765845"/>
+                </a:lnTo>
+                <a:lnTo>
+                  <a:pt x="3095625" y="755768"/>
+                </a:lnTo>
+                <a:lnTo>
+                  <a:pt x="3175000" y="744141"/>
+                </a:lnTo>
+                <a:lnTo>
+                  <a:pt x="3254375" y="730963"/>
+                </a:lnTo>
+                <a:lnTo>
+                  <a:pt x="3333750" y="716235"/>
+                </a:lnTo>
+                <a:lnTo>
+                  <a:pt x="3413125" y="699957"/>
+                </a:lnTo>
+                <a:lnTo>
+                  <a:pt x="3492500" y="682129"/>
+                </a:lnTo>
+                <a:lnTo>
+                  <a:pt x="3571875" y="662750"/>
+                </a:lnTo>
+                <a:lnTo>
+                  <a:pt x="3651250" y="641821"/>
+                </a:lnTo>
+                <a:lnTo>
+                  <a:pt x="3730625" y="619342"/>
+                </a:lnTo>
+                <a:lnTo>
+                  <a:pt x="3810000" y="595312"/>
+                </a:lnTo>
+                <a:lnTo>
+                  <a:pt x="3889375" y="569733"/>
+                </a:lnTo>
+                <a:lnTo>
+                  <a:pt x="3968750" y="542603"/>
+                </a:lnTo>
+                <a:lnTo>
+                  <a:pt x="4048125" y="513922"/>
+                </a:lnTo>
+                <a:lnTo>
+                  <a:pt x="4127500" y="483691"/>
+                </a:lnTo>
+                <a:lnTo>
+                  <a:pt x="4206875" y="451910"/>
+                </a:lnTo>
+                <a:lnTo>
+                  <a:pt x="4286250" y="418579"/>
+                </a:lnTo>
+                <a:lnTo>
+                  <a:pt x="4365625" y="383698"/>
+                </a:lnTo>
+                <a:lnTo>
+                  <a:pt x="4445000" y="347266"/>
+                </a:lnTo>
+                <a:lnTo>
+                  <a:pt x="4524375" y="309283"/>
+                </a:lnTo>
+                <a:lnTo>
+                  <a:pt x="4603750" y="269751"/>
+                </a:lnTo>
+                <a:lnTo>
+                  <a:pt x="4683125" y="228668"/>
+                </a:lnTo>
+                <a:lnTo>
+                  <a:pt x="4762500" y="186035"/>
+                </a:lnTo>
+                <a:lnTo>
+                  <a:pt x="4841875" y="141852"/>
+                </a:lnTo>
+                <a:lnTo>
+                  <a:pt x="4921250" y="96118"/>
+                </a:lnTo>
+                <a:lnTo>
+                  <a:pt x="5000625" y="48834"/>
+                </a:lnTo>
+                <a:lnTo>
+                  <a:pt x="5080000" y="0"/>
+                </a:lnTo>
+              </a:path>
+            </a:pathLst>
+          </a:custGeom>
+          <a:noFill/>
+          <a:ln w="50800" cap="rnd">
+            <a:solidFill>
+              <a:srgbClr val="F26A1B"/>
+            </a:solidFill>
+            <a:round/>
+          </a:ln>
+        </p:spPr>
+        <p:txBody>
+          <a:bodyPr rtlCol="0" anchor="ctr"/>
+          <a:lstStyle/>
+          <a:p>
+            <a:pPr algn="ctr"/>
+          </a:p>
+        </p:txBody>
+      </p:sp>
+      <p:sp>
+        <p:nvSpPr>
+          <p:cNvPr id="5" name="図・線4"/>
+          <p:cNvSpPr/>
+          <p:nvPr/>
+        </p:nvSpPr>
+        <p:spPr>
+          <a:xfrm>
+            <a:off x="8636000" y="4381500"/>
+            <a:ext cx="1016000" cy="0"/>
+          </a:xfrm>
+          <a:custGeom>
+            <a:avLst/>
+            <a:gdLst/>
+            <a:ahLst/>
+            <a:cxnLst/>
+            <a:rect l="l" t="t" r="r" b="b"/>
+            <a:pathLst>
+              <a:path w="1016000" h="0">
+                <a:moveTo>
+                  <a:pt x="0" y="0"/>
+                </a:moveTo>
+                <a:lnTo>
+                  <a:pt x="1016000" y="0"/>
+                </a:lnTo>
+              </a:path>
+            </a:pathLst>
+          </a:custGeom>
+          <a:noFill/>
+          <a:ln w="38100" cap="rnd">
+            <a:solidFill>
+              <a:srgbClr val="FFFFFF"/>
+            </a:solidFill>
+            <a:round/>
+          </a:ln>
+        </p:spPr>
+        <p:txBody>
+          <a:bodyPr rtlCol="0" anchor="ctr"/>
+          <a:lstStyle/>
+          <a:p>
+            <a:pPr algn="ctr"/>
+          </a:p>
+        </p:txBody>
+      </p:sp>
+      <p:sp>
+        <p:nvSpPr>
+          <p:cNvPr id="6" name="図・点"/>
+          <p:cNvSpPr/>
+          <p:nvPr/>
+        </p:nvSpPr>
+        <p:spPr>
+          <a:xfrm>
+            <a:off x="2432050" y="4273550"/>
+            <a:ext cx="215900" cy="215900"/>
+          </a:xfrm>
+          <a:prstGeom prst="ellipse">
+            <a:avLst/>
+          </a:prstGeom>
+          <a:solidFill>
+            <a:srgbClr val="FFFFFF"/>
+          </a:solidFill>
+          <a:ln>
+            <a:noFill/>
+          </a:ln>
+        </p:spPr>
+        <p:txBody>
+          <a:bodyPr rtlCol="0" anchor="ctr"/>
+          <a:lstStyle/>
+          <a:p>
+            <a:pPr algn="ctr"/>
+          </a:p>
+        </p:txBody>
+      </p:sp>
+      <p:sp>
+        <p:nvSpPr>
+          <p:cNvPr id="7" name="図・点"/>
+          <p:cNvSpPr/>
+          <p:nvPr/>
+        </p:nvSpPr>
+        <p:spPr>
+          <a:xfrm>
+            <a:off x="9544050" y="4273550"/>
+            <a:ext cx="215900" cy="215900"/>
+          </a:xfrm>
+          <a:prstGeom prst="ellipse">
+            <a:avLst/>
+          </a:prstGeom>
+          <a:solidFill>
+            <a:srgbClr val="FFFFFF"/>
+          </a:solidFill>
+          <a:ln>
+            <a:noFill/>
+          </a:ln>
+        </p:spPr>
+        <p:txBody>
+          <a:bodyPr rtlCol="0" anchor="ctr"/>
+          <a:lstStyle/>
+          <a:p>
+            <a:pPr algn="ctr"/>
+          </a:p>
+        </p:txBody>
+      </p:sp>
+      <p:sp>
+        <p:nvSpPr>
+          <p:cNvPr id="8" name="図・ラベル"/>
           <p:cNvSpPr txBox="1"/>
           <p:nvPr/>
         </p:nvSpPr>
         <p:spPr>
           <a:xfrm>
-            <a:off x="450850" y="2346008"/>
-            <a:ext cx="7674670" cy="2055812"/>
+            <a:off x="-3175000" y="3634740"/>
+            <a:ext cx="11430000" cy="432816"/>
           </a:xfrm>
           <a:prstGeom prst="rect">
             <a:avLst/>
@@ -5770,9 +5689,9 @@
           <a:bodyPr wrap="none" lIns="0" rIns="0" tIns="0" bIns="0" anchor="t"/>
           <a:lstStyle/>
           <a:p>
-            <a:pPr algn="l">
+            <a:pPr algn="ctr">
               <a:lnSpc>
-                <a:spcPts val="8093"/>
+                <a:spcPts val="3408"/>
               </a:lnSpc>
               <a:spcBef>
                 <a:spcPts val="0"/>
@@ -5782,7 +5701,7 @@
               </a:spcAft>
             </a:pPr>
             <a:r>
-              <a:rPr sz="5699" b="0" spc="-57" lang="ja-JP" altLang="en-US">
+              <a:rPr sz="2400" b="0" spc="-24" lang="ja-JP" altLang="en-US">
                 <a:solidFill>
                   <a:srgbClr val="FFFFFF"/>
                 </a:solidFill>
@@ -5790,13 +5709,34 @@
                 <a:ea typeface="Noto Sans JP Medium"/>
                 <a:cs typeface="Noto Sans JP Medium"/>
               </a:rPr>
-              <a:t>「持ちたくない」が、</a:t>
-            </a:r>
-          </a:p>
-          <a:p>
-            <a:pPr algn="l" marL="361950">
+              <a:t>ホテル</a:t>
+            </a:r>
+          </a:p>
+        </p:txBody>
+      </p:sp>
+      <p:sp>
+        <p:nvSpPr>
+          <p:cNvPr id="9" name="図・ラベル"/>
+          <p:cNvSpPr txBox="1"/>
+          <p:nvPr/>
+        </p:nvSpPr>
+        <p:spPr>
+          <a:xfrm>
+            <a:off x="-3175000" y="4583112"/>
+            <a:ext cx="11430000" cy="270510"/>
+          </a:xfrm>
+          <a:prstGeom prst="rect">
+            <a:avLst/>
+          </a:prstGeom>
+          <a:noFill/>
+        </p:spPr>
+        <p:txBody>
+          <a:bodyPr wrap="none" lIns="0" rIns="0" tIns="0" bIns="0" anchor="t"/>
+          <a:lstStyle/>
+          <a:p>
+            <a:pPr algn="ctr">
               <a:lnSpc>
-                <a:spcPts val="8093"/>
+                <a:spcPts val="2129"/>
               </a:lnSpc>
               <a:spcBef>
                 <a:spcPts val="0"/>
@@ -5806,7 +5746,52 @@
               </a:spcAft>
             </a:pPr>
             <a:r>
-              <a:rPr sz="5699" b="0" spc="-57" lang="ja-JP" altLang="en-US">
+              <a:rPr sz="1500" b="0" spc="-15" lang="ja-JP" altLang="en-US">
+                <a:solidFill>
+                  <a:srgbClr val="A3A3A3"/>
+                </a:solidFill>
+                <a:latin typeface="Noto Sans JP"/>
+                <a:ea typeface="Noto Sans JP"/>
+                <a:cs typeface="Noto Sans JP"/>
+              </a:rPr>
+              <a:t>チェックアウトで預ける</a:t>
+            </a:r>
+          </a:p>
+        </p:txBody>
+      </p:sp>
+      <p:sp>
+        <p:nvSpPr>
+          <p:cNvPr id="10" name="図・ラベル"/>
+          <p:cNvSpPr txBox="1"/>
+          <p:nvPr/>
+        </p:nvSpPr>
+        <p:spPr>
+          <a:xfrm>
+            <a:off x="3937000" y="3634740"/>
+            <a:ext cx="11430000" cy="432816"/>
+          </a:xfrm>
+          <a:prstGeom prst="rect">
+            <a:avLst/>
+          </a:prstGeom>
+          <a:noFill/>
+        </p:spPr>
+        <p:txBody>
+          <a:bodyPr wrap="none" lIns="0" rIns="0" tIns="0" bIns="0" anchor="t"/>
+          <a:lstStyle/>
+          <a:p>
+            <a:pPr algn="ctr">
+              <a:lnSpc>
+                <a:spcPts val="3408"/>
+              </a:lnSpc>
+              <a:spcBef>
+                <a:spcPts val="0"/>
+              </a:spcBef>
+              <a:spcAft>
+                <a:spcPts val="0"/>
+              </a:spcAft>
+            </a:pPr>
+            <a:r>
+              <a:rPr sz="2400" b="0" spc="-24" lang="ja-JP" altLang="en-US">
                 <a:solidFill>
                   <a:srgbClr val="FFFFFF"/>
                 </a:solidFill>
@@ -5814,7 +5799,256 @@
                 <a:ea typeface="Noto Sans JP Medium"/>
                 <a:cs typeface="Noto Sans JP Medium"/>
               </a:rPr>
-              <a:t>購買を止めている。</a:t>
+              <a:t>次のホテル</a:t>
+            </a:r>
+          </a:p>
+        </p:txBody>
+      </p:sp>
+      <p:sp>
+        <p:nvSpPr>
+          <p:cNvPr id="11" name="図・ラベル"/>
+          <p:cNvSpPr txBox="1"/>
+          <p:nvPr/>
+        </p:nvSpPr>
+        <p:spPr>
+          <a:xfrm>
+            <a:off x="3937000" y="4583112"/>
+            <a:ext cx="11430000" cy="270510"/>
+          </a:xfrm>
+          <a:prstGeom prst="rect">
+            <a:avLst/>
+          </a:prstGeom>
+          <a:noFill/>
+        </p:spPr>
+        <p:txBody>
+          <a:bodyPr wrap="none" lIns="0" rIns="0" tIns="0" bIns="0" anchor="t"/>
+          <a:lstStyle/>
+          <a:p>
+            <a:pPr algn="ctr">
+              <a:lnSpc>
+                <a:spcPts val="2129"/>
+              </a:lnSpc>
+              <a:spcBef>
+                <a:spcPts val="0"/>
+              </a:spcBef>
+              <a:spcAft>
+                <a:spcPts val="0"/>
+              </a:spcAft>
+            </a:pPr>
+            <a:r>
+              <a:rPr sz="1500" b="0" spc="-15" lang="ja-JP" altLang="en-US">
+                <a:solidFill>
+                  <a:srgbClr val="A3A3A3"/>
+                </a:solidFill>
+                <a:latin typeface="Noto Sans JP"/>
+                <a:ea typeface="Noto Sans JP"/>
+                <a:cs typeface="Noto Sans JP"/>
+              </a:rPr>
+              <a:t>先に届いている</a:t>
+            </a:r>
+          </a:p>
+        </p:txBody>
+      </p:sp>
+      <p:sp>
+        <p:nvSpPr>
+          <p:cNvPr id="12" name="図・ラベル"/>
+          <p:cNvSpPr txBox="1"/>
+          <p:nvPr/>
+        </p:nvSpPr>
+        <p:spPr>
+          <a:xfrm>
+            <a:off x="381000" y="3047048"/>
+            <a:ext cx="11430000" cy="378714"/>
+          </a:xfrm>
+          <a:prstGeom prst="rect">
+            <a:avLst/>
+          </a:prstGeom>
+          <a:noFill/>
+        </p:spPr>
+        <p:txBody>
+          <a:bodyPr wrap="none" lIns="0" rIns="0" tIns="0" bIns="0" anchor="t"/>
+          <a:lstStyle/>
+          <a:p>
+            <a:pPr algn="ctr">
+              <a:lnSpc>
+                <a:spcPts val="2982"/>
+              </a:lnSpc>
+              <a:spcBef>
+                <a:spcPts val="0"/>
+              </a:spcBef>
+              <a:spcAft>
+                <a:spcPts val="0"/>
+              </a:spcAft>
+            </a:pPr>
+            <a:r>
+              <a:rPr sz="2100" b="0" spc="-21" lang="ja-JP" altLang="en-US">
+                <a:solidFill>
+                  <a:srgbClr val="FFFFFF"/>
+                </a:solidFill>
+                <a:latin typeface="Noto Sans JP Medium"/>
+                <a:ea typeface="Noto Sans JP Medium"/>
+                <a:cs typeface="Noto Sans JP Medium"/>
+              </a:rPr>
+              <a:t>人は、身軽に観光へ。</a:t>
+            </a:r>
+          </a:p>
+        </p:txBody>
+      </p:sp>
+      <p:sp>
+        <p:nvSpPr>
+          <p:cNvPr id="13" name="図・ラベル"/>
+          <p:cNvSpPr txBox="1"/>
+          <p:nvPr/>
+        </p:nvSpPr>
+        <p:spPr>
+          <a:xfrm>
+            <a:off x="381000" y="5326698"/>
+            <a:ext cx="11430000" cy="378714"/>
+          </a:xfrm>
+          <a:prstGeom prst="rect">
+            <a:avLst/>
+          </a:prstGeom>
+          <a:noFill/>
+        </p:spPr>
+        <p:txBody>
+          <a:bodyPr wrap="none" lIns="0" rIns="0" tIns="0" bIns="0" anchor="t"/>
+          <a:lstStyle/>
+          <a:p>
+            <a:pPr algn="ctr">
+              <a:lnSpc>
+                <a:spcPts val="2982"/>
+              </a:lnSpc>
+              <a:spcBef>
+                <a:spcPts val="0"/>
+              </a:spcBef>
+              <a:spcAft>
+                <a:spcPts val="0"/>
+              </a:spcAft>
+            </a:pPr>
+            <a:r>
+              <a:rPr sz="2100" b="0" spc="-21" lang="ja-JP" altLang="en-US">
+                <a:solidFill>
+                  <a:srgbClr val="F26A1B"/>
+                </a:solidFill>
+                <a:latin typeface="Noto Sans JP Medium"/>
+                <a:ea typeface="Noto Sans JP Medium"/>
+                <a:cs typeface="Noto Sans JP Medium"/>
+              </a:rPr>
+              <a:t>荷物は、今ある物流で。</a:t>
+            </a:r>
+          </a:p>
+        </p:txBody>
+      </p:sp>
+      <p:sp>
+        <p:nvSpPr>
+          <p:cNvPr id="14" name="図・ラベル"/>
+          <p:cNvSpPr txBox="1"/>
+          <p:nvPr/>
+        </p:nvSpPr>
+        <p:spPr>
+          <a:xfrm>
+            <a:off x="381000" y="5776912"/>
+            <a:ext cx="11430000" cy="270510"/>
+          </a:xfrm>
+          <a:prstGeom prst="rect">
+            <a:avLst/>
+          </a:prstGeom>
+          <a:noFill/>
+        </p:spPr>
+        <p:txBody>
+          <a:bodyPr wrap="none" lIns="0" rIns="0" tIns="0" bIns="0" anchor="t"/>
+          <a:lstStyle/>
+          <a:p>
+            <a:pPr algn="ctr">
+              <a:lnSpc>
+                <a:spcPts val="2129"/>
+              </a:lnSpc>
+              <a:spcBef>
+                <a:spcPts val="0"/>
+              </a:spcBef>
+              <a:spcAft>
+                <a:spcPts val="0"/>
+              </a:spcAft>
+            </a:pPr>
+            <a:r>
+              <a:rPr sz="1500" b="0" spc="-15" lang="ja-JP" altLang="en-US">
+                <a:solidFill>
+                  <a:srgbClr val="A3A3A3"/>
+                </a:solidFill>
+                <a:latin typeface="Noto Sans JP"/>
+                <a:ea typeface="Noto Sans JP"/>
+                <a:cs typeface="Noto Sans JP"/>
+              </a:rPr>
+              <a:t>旅行会社・DMCからの依頼を受けて、BondExが手配します</a:t>
+            </a:r>
+          </a:p>
+        </p:txBody>
+      </p:sp>
+      <p:sp>
+        <p:nvSpPr>
+          <p:cNvPr id="15" name="見出し"/>
+          <p:cNvSpPr txBox="1"/>
+          <p:nvPr/>
+        </p:nvSpPr>
+        <p:spPr>
+          <a:xfrm>
+            <a:off x="812800" y="692785"/>
+            <a:ext cx="6583759" cy="1658938"/>
+          </a:xfrm>
+          <a:prstGeom prst="rect">
+            <a:avLst/>
+          </a:prstGeom>
+          <a:noFill/>
+        </p:spPr>
+        <p:txBody>
+          <a:bodyPr wrap="none" lIns="0" rIns="0" tIns="0" bIns="0" anchor="t"/>
+          <a:lstStyle/>
+          <a:p>
+            <a:pPr algn="l">
+              <a:lnSpc>
+                <a:spcPts val="6531"/>
+              </a:lnSpc>
+              <a:spcBef>
+                <a:spcPts val="0"/>
+              </a:spcBef>
+              <a:spcAft>
+                <a:spcPts val="0"/>
+              </a:spcAft>
+            </a:pPr>
+            <a:r>
+              <a:rPr sz="4600" b="0" spc="-46" lang="ja-JP" altLang="en-US">
+                <a:solidFill>
+                  <a:srgbClr val="FFFFFF"/>
+                </a:solidFill>
+                <a:latin typeface="Noto Sans JP Medium"/>
+                <a:ea typeface="Noto Sans JP Medium"/>
+                <a:cs typeface="Noto Sans JP Medium"/>
+              </a:rPr>
+              <a:t>荷物を手放す場所を、</a:t>
+            </a:r>
+          </a:p>
+          <a:p>
+            <a:pPr algn="l">
+              <a:lnSpc>
+                <a:spcPts val="6531"/>
+              </a:lnSpc>
+              <a:spcBef>
+                <a:spcPts val="0"/>
+              </a:spcBef>
+              <a:spcAft>
+                <a:spcPts val="0"/>
+              </a:spcAft>
+            </a:pPr>
+            <a:r>
+              <a:rPr sz="4600" b="0" spc="-46" lang="ja-JP" altLang="en-US">
+                <a:solidFill>
+                  <a:srgbClr val="FFFFFF"/>
+                </a:solidFill>
+                <a:latin typeface="Noto Sans JP Medium"/>
+                <a:ea typeface="Noto Sans JP Medium"/>
+                <a:cs typeface="Noto Sans JP Medium"/>
+              </a:rPr>
+              <a:t>旅の中に。</a:t>
             </a:r>
           </a:p>
         </p:txBody>
@@ -5847,14 +6081,14 @@
       <p:grpSpPr/>
       <p:sp>
         <p:nvSpPr>
-          <p:cNvPr id="2" name="数字の前後"/>
+          <p:cNvPr id="2" name="見出し"/>
           <p:cNvSpPr txBox="1"/>
           <p:nvPr/>
         </p:nvSpPr>
         <p:spPr>
           <a:xfrm>
-            <a:off x="0" y="1358979"/>
-            <a:ext cx="12192000" cy="528241"/>
+            <a:off x="450850" y="2346008"/>
+            <a:ext cx="7674670" cy="2055812"/>
           </a:xfrm>
           <a:prstGeom prst="rect">
             <a:avLst/>
@@ -5865,9 +6099,9 @@
           <a:bodyPr wrap="none" lIns="0" rIns="0" tIns="0" bIns="0" anchor="t"/>
           <a:lstStyle/>
           <a:p>
-            <a:pPr algn="ctr">
+            <a:pPr algn="l">
               <a:lnSpc>
-                <a:spcPts val="4160"/>
+                <a:spcPts val="8093"/>
               </a:lnSpc>
               <a:spcBef>
                 <a:spcPts val="0"/>
@@ -5877,42 +6111,21 @@
               </a:spcAft>
             </a:pPr>
             <a:r>
-              <a:rPr sz="3200" b="0" spc="-32" lang="ja-JP" altLang="en-US">
+              <a:rPr sz="5699" b="0" spc="-57" lang="ja-JP" altLang="en-US">
                 <a:solidFill>
-                  <a:srgbClr val="C7C7C7"/>
+                  <a:srgbClr val="FFFFFF"/>
                 </a:solidFill>
                 <a:latin typeface="Noto Sans JP Medium"/>
                 <a:ea typeface="Noto Sans JP Medium"/>
                 <a:cs typeface="Noto Sans JP Medium"/>
               </a:rPr>
-              <a:t>配送を伝えた結果、</a:t>
-            </a:r>
-          </a:p>
-        </p:txBody>
-      </p:sp>
-      <p:sp>
-        <p:nvSpPr>
-          <p:cNvPr id="3" name="数字の前後"/>
-          <p:cNvSpPr txBox="1"/>
-          <p:nvPr/>
-        </p:nvSpPr>
-        <p:spPr>
-          <a:xfrm>
-            <a:off x="0" y="4909820"/>
-            <a:ext cx="12192000" cy="528241"/>
-          </a:xfrm>
-          <a:prstGeom prst="rect">
-            <a:avLst/>
-          </a:prstGeom>
-          <a:noFill/>
-        </p:spPr>
-        <p:txBody>
-          <a:bodyPr wrap="none" lIns="0" rIns="0" tIns="0" bIns="0" anchor="t"/>
-          <a:lstStyle/>
-          <a:p>
-            <a:pPr algn="ctr">
+              <a:t>「持ちたくない」が、</a:t>
+            </a:r>
+          </a:p>
+          <a:p>
+            <a:pPr algn="l" marL="361950">
               <a:lnSpc>
-                <a:spcPts val="4160"/>
+                <a:spcPts val="8093"/>
               </a:lnSpc>
               <a:spcBef>
                 <a:spcPts val="0"/>
@@ -5922,195 +6135,15 @@
               </a:spcAft>
             </a:pPr>
             <a:r>
-              <a:rPr sz="3200" b="0" spc="-32" lang="ja-JP" altLang="en-US">
+              <a:rPr sz="5699" b="0" spc="-57" lang="ja-JP" altLang="en-US">
                 <a:solidFill>
-                  <a:srgbClr val="C7C7C7"/>
+                  <a:srgbClr val="FFFFFF"/>
                 </a:solidFill>
                 <a:latin typeface="Noto Sans JP Medium"/>
                 <a:ea typeface="Noto Sans JP Medium"/>
                 <a:cs typeface="Noto Sans JP Medium"/>
               </a:rPr>
-              <a:t>の購入へ。</a:t>
-            </a:r>
-          </a:p>
-        </p:txBody>
-      </p:sp>
-      <p:sp>
-        <p:nvSpPr>
-          <p:cNvPr id="4" name="数字"/>
-          <p:cNvSpPr txBox="1"/>
-          <p:nvPr/>
-        </p:nvSpPr>
-        <p:spPr>
-          <a:xfrm>
-            <a:off x="2826147" y="2992247"/>
-            <a:ext cx="1501180" cy="1623060"/>
-          </a:xfrm>
-          <a:prstGeom prst="rect">
-            <a:avLst/>
-          </a:prstGeom>
-          <a:noFill/>
-        </p:spPr>
-        <p:txBody>
-          <a:bodyPr wrap="none" lIns="0" rIns="0" tIns="0" bIns="0" anchor="t"/>
-          <a:lstStyle/>
-          <a:p>
-            <a:pPr algn="l">
-              <a:lnSpc>
-                <a:spcPts val="12780"/>
-              </a:lnSpc>
-              <a:spcBef>
-                <a:spcPts val="0"/>
-              </a:spcBef>
-              <a:spcAft>
-                <a:spcPts val="0"/>
-              </a:spcAft>
-            </a:pPr>
-            <a:r>
-              <a:rPr sz="9000" b="0" spc="-180" lang="ja-JP" altLang="en-US">
-                <a:solidFill>
-                  <a:srgbClr val="F26A1B"/>
-                </a:solidFill>
-                <a:latin typeface="Noto Sans JP Medium"/>
-                <a:ea typeface="Noto Sans JP Medium"/>
-                <a:cs typeface="Noto Sans JP Medium"/>
-              </a:rPr>
-              <a:t>約</a:t>
-            </a:r>
-          </a:p>
-        </p:txBody>
-      </p:sp>
-      <p:sp>
-        <p:nvSpPr>
-          <p:cNvPr id="5" name="数字"/>
-          <p:cNvSpPr txBox="1"/>
-          <p:nvPr/>
-        </p:nvSpPr>
-        <p:spPr>
-          <a:xfrm>
-            <a:off x="3946327" y="2137502"/>
-            <a:ext cx="3560068" cy="2773680"/>
-          </a:xfrm>
-          <a:prstGeom prst="rect">
-            <a:avLst/>
-          </a:prstGeom>
-          <a:noFill/>
-        </p:spPr>
-        <p:txBody>
-          <a:bodyPr wrap="none" lIns="0" rIns="0" tIns="0" bIns="0" anchor="t"/>
-          <a:lstStyle/>
-          <a:p>
-            <a:pPr algn="l">
-              <a:lnSpc>
-                <a:spcPts val="21840"/>
-              </a:lnSpc>
-              <a:spcBef>
-                <a:spcPts val="0"/>
-              </a:spcBef>
-              <a:spcAft>
-                <a:spcPts val="0"/>
-              </a:spcAft>
-            </a:pPr>
-            <a:r>
-              <a:rPr sz="21000" b="0" spc="-840" lang="ja-JP" altLang="en-US">
-                <a:solidFill>
-                  <a:srgbClr val="F26A1B"/>
-                </a:solidFill>
-                <a:latin typeface="Inter SemiBold"/>
-                <a:ea typeface="Inter SemiBold"/>
-                <a:cs typeface="Inter SemiBold"/>
-              </a:rPr>
-              <a:t>50</a:t>
-            </a:r>
-          </a:p>
-        </p:txBody>
-      </p:sp>
-      <p:sp>
-        <p:nvSpPr>
-          <p:cNvPr id="6" name="数字"/>
-          <p:cNvSpPr txBox="1"/>
-          <p:nvPr/>
-        </p:nvSpPr>
-        <p:spPr>
-          <a:xfrm>
-            <a:off x="7125395" y="2992247"/>
-            <a:ext cx="2621359" cy="1623060"/>
-          </a:xfrm>
-          <a:prstGeom prst="rect">
-            <a:avLst/>
-          </a:prstGeom>
-          <a:noFill/>
-        </p:spPr>
-        <p:txBody>
-          <a:bodyPr wrap="none" lIns="0" rIns="0" tIns="0" bIns="0" anchor="t"/>
-          <a:lstStyle/>
-          <a:p>
-            <a:pPr algn="l">
-              <a:lnSpc>
-                <a:spcPts val="12780"/>
-              </a:lnSpc>
-              <a:spcBef>
-                <a:spcPts val="0"/>
-              </a:spcBef>
-              <a:spcAft>
-                <a:spcPts val="0"/>
-              </a:spcAft>
-            </a:pPr>
-            <a:r>
-              <a:rPr sz="9000" b="0" spc="-180" lang="ja-JP" altLang="en-US">
-                <a:solidFill>
-                  <a:srgbClr val="F26A1B"/>
-                </a:solidFill>
-                <a:latin typeface="Noto Sans JP Medium"/>
-                <a:ea typeface="Noto Sans JP Medium"/>
-                <a:cs typeface="Noto Sans JP Medium"/>
-              </a:rPr>
-              <a:t>万円</a:t>
-            </a:r>
-          </a:p>
-        </p:txBody>
-      </p:sp>
-      <p:sp>
-        <p:nvSpPr>
-          <p:cNvPr id="7" name="注記"/>
-          <p:cNvSpPr txBox="1"/>
-          <p:nvPr/>
-        </p:nvSpPr>
-        <p:spPr>
-          <a:xfrm>
-            <a:off x="812800" y="6172200"/>
-            <a:ext cx="4866680" cy="203200"/>
-          </a:xfrm>
-          <a:prstGeom prst="rect">
-            <a:avLst/>
-          </a:prstGeom>
-          <a:noFill/>
-        </p:spPr>
-        <p:txBody>
-          <a:bodyPr wrap="none" lIns="0" rIns="0" tIns="0" bIns="0" anchor="t"/>
-          <a:lstStyle/>
-          <a:p>
-            <a:pPr>
-              <a:lnSpc>
-                <a:spcPts val="1600"/>
-              </a:lnSpc>
-              <a:spcBef>
-                <a:spcPts val="0"/>
-              </a:spcBef>
-              <a:spcAft>
-                <a:spcPts val="0"/>
-              </a:spcAft>
-            </a:pPr>
-            <a:r>
-              <a:rPr sz="1100" b="0" spc="11" lang="ja-JP" altLang="en-US">
-                <a:solidFill>
-                  <a:srgbClr val="A3A3A3"/>
-                </a:solidFill>
-                <a:latin typeface="Noto Sans JP"/>
-                <a:ea typeface="Noto Sans JP"/>
-                <a:cs typeface="Noto Sans JP"/>
-              </a:rPr>
-              <a:t>※ 登壇者の実体験（1件）。一般的な効果を示す数値ではありません。</a:t>
+              <a:t>購買を止めている。</a:t>
             </a:r>
           </a:p>
         </p:txBody>
@@ -6143,6 +6176,302 @@
       <p:grpSpPr/>
       <p:sp>
         <p:nvSpPr>
+          <p:cNvPr id="2" name="数字の前後"/>
+          <p:cNvSpPr txBox="1"/>
+          <p:nvPr/>
+        </p:nvSpPr>
+        <p:spPr>
+          <a:xfrm>
+            <a:off x="0" y="1358979"/>
+            <a:ext cx="12192000" cy="528241"/>
+          </a:xfrm>
+          <a:prstGeom prst="rect">
+            <a:avLst/>
+          </a:prstGeom>
+          <a:noFill/>
+        </p:spPr>
+        <p:txBody>
+          <a:bodyPr wrap="none" lIns="0" rIns="0" tIns="0" bIns="0" anchor="t"/>
+          <a:lstStyle/>
+          <a:p>
+            <a:pPr algn="ctr">
+              <a:lnSpc>
+                <a:spcPts val="4160"/>
+              </a:lnSpc>
+              <a:spcBef>
+                <a:spcPts val="0"/>
+              </a:spcBef>
+              <a:spcAft>
+                <a:spcPts val="0"/>
+              </a:spcAft>
+            </a:pPr>
+            <a:r>
+              <a:rPr sz="3200" b="0" spc="-32" lang="ja-JP" altLang="en-US">
+                <a:solidFill>
+                  <a:srgbClr val="C7C7C7"/>
+                </a:solidFill>
+                <a:latin typeface="Noto Sans JP Medium"/>
+                <a:ea typeface="Noto Sans JP Medium"/>
+                <a:cs typeface="Noto Sans JP Medium"/>
+              </a:rPr>
+              <a:t>配送を伝えた結果、</a:t>
+            </a:r>
+          </a:p>
+        </p:txBody>
+      </p:sp>
+      <p:sp>
+        <p:nvSpPr>
+          <p:cNvPr id="3" name="数字の前後"/>
+          <p:cNvSpPr txBox="1"/>
+          <p:nvPr/>
+        </p:nvSpPr>
+        <p:spPr>
+          <a:xfrm>
+            <a:off x="0" y="4909820"/>
+            <a:ext cx="12192000" cy="528241"/>
+          </a:xfrm>
+          <a:prstGeom prst="rect">
+            <a:avLst/>
+          </a:prstGeom>
+          <a:noFill/>
+        </p:spPr>
+        <p:txBody>
+          <a:bodyPr wrap="none" lIns="0" rIns="0" tIns="0" bIns="0" anchor="t"/>
+          <a:lstStyle/>
+          <a:p>
+            <a:pPr algn="ctr">
+              <a:lnSpc>
+                <a:spcPts val="4160"/>
+              </a:lnSpc>
+              <a:spcBef>
+                <a:spcPts val="0"/>
+              </a:spcBef>
+              <a:spcAft>
+                <a:spcPts val="0"/>
+              </a:spcAft>
+            </a:pPr>
+            <a:r>
+              <a:rPr sz="3200" b="0" spc="-32" lang="ja-JP" altLang="en-US">
+                <a:solidFill>
+                  <a:srgbClr val="C7C7C7"/>
+                </a:solidFill>
+                <a:latin typeface="Noto Sans JP Medium"/>
+                <a:ea typeface="Noto Sans JP Medium"/>
+                <a:cs typeface="Noto Sans JP Medium"/>
+              </a:rPr>
+              <a:t>の購入へ。</a:t>
+            </a:r>
+          </a:p>
+        </p:txBody>
+      </p:sp>
+      <p:sp>
+        <p:nvSpPr>
+          <p:cNvPr id="4" name="数字"/>
+          <p:cNvSpPr txBox="1"/>
+          <p:nvPr/>
+        </p:nvSpPr>
+        <p:spPr>
+          <a:xfrm>
+            <a:off x="2826147" y="2992247"/>
+            <a:ext cx="1501180" cy="1623060"/>
+          </a:xfrm>
+          <a:prstGeom prst="rect">
+            <a:avLst/>
+          </a:prstGeom>
+          <a:noFill/>
+        </p:spPr>
+        <p:txBody>
+          <a:bodyPr wrap="none" lIns="0" rIns="0" tIns="0" bIns="0" anchor="t"/>
+          <a:lstStyle/>
+          <a:p>
+            <a:pPr algn="l">
+              <a:lnSpc>
+                <a:spcPts val="12780"/>
+              </a:lnSpc>
+              <a:spcBef>
+                <a:spcPts val="0"/>
+              </a:spcBef>
+              <a:spcAft>
+                <a:spcPts val="0"/>
+              </a:spcAft>
+            </a:pPr>
+            <a:r>
+              <a:rPr sz="9000" b="0" spc="-180" lang="ja-JP" altLang="en-US">
+                <a:solidFill>
+                  <a:srgbClr val="F26A1B"/>
+                </a:solidFill>
+                <a:latin typeface="Noto Sans JP Medium"/>
+                <a:ea typeface="Noto Sans JP Medium"/>
+                <a:cs typeface="Noto Sans JP Medium"/>
+              </a:rPr>
+              <a:t>約</a:t>
+            </a:r>
+          </a:p>
+        </p:txBody>
+      </p:sp>
+      <p:sp>
+        <p:nvSpPr>
+          <p:cNvPr id="5" name="数字"/>
+          <p:cNvSpPr txBox="1"/>
+          <p:nvPr/>
+        </p:nvSpPr>
+        <p:spPr>
+          <a:xfrm>
+            <a:off x="3946327" y="2137502"/>
+            <a:ext cx="3560068" cy="2773680"/>
+          </a:xfrm>
+          <a:prstGeom prst="rect">
+            <a:avLst/>
+          </a:prstGeom>
+          <a:noFill/>
+        </p:spPr>
+        <p:txBody>
+          <a:bodyPr wrap="none" lIns="0" rIns="0" tIns="0" bIns="0" anchor="t"/>
+          <a:lstStyle/>
+          <a:p>
+            <a:pPr algn="l">
+              <a:lnSpc>
+                <a:spcPts val="21840"/>
+              </a:lnSpc>
+              <a:spcBef>
+                <a:spcPts val="0"/>
+              </a:spcBef>
+              <a:spcAft>
+                <a:spcPts val="0"/>
+              </a:spcAft>
+            </a:pPr>
+            <a:r>
+              <a:rPr sz="21000" b="0" spc="-840" lang="ja-JP" altLang="en-US">
+                <a:solidFill>
+                  <a:srgbClr val="F26A1B"/>
+                </a:solidFill>
+                <a:latin typeface="Inter SemiBold"/>
+                <a:ea typeface="Inter SemiBold"/>
+                <a:cs typeface="Inter SemiBold"/>
+              </a:rPr>
+              <a:t>50</a:t>
+            </a:r>
+          </a:p>
+        </p:txBody>
+      </p:sp>
+      <p:sp>
+        <p:nvSpPr>
+          <p:cNvPr id="6" name="数字"/>
+          <p:cNvSpPr txBox="1"/>
+          <p:nvPr/>
+        </p:nvSpPr>
+        <p:spPr>
+          <a:xfrm>
+            <a:off x="7125395" y="2992247"/>
+            <a:ext cx="2621359" cy="1623060"/>
+          </a:xfrm>
+          <a:prstGeom prst="rect">
+            <a:avLst/>
+          </a:prstGeom>
+          <a:noFill/>
+        </p:spPr>
+        <p:txBody>
+          <a:bodyPr wrap="none" lIns="0" rIns="0" tIns="0" bIns="0" anchor="t"/>
+          <a:lstStyle/>
+          <a:p>
+            <a:pPr algn="l">
+              <a:lnSpc>
+                <a:spcPts val="12780"/>
+              </a:lnSpc>
+              <a:spcBef>
+                <a:spcPts val="0"/>
+              </a:spcBef>
+              <a:spcAft>
+                <a:spcPts val="0"/>
+              </a:spcAft>
+            </a:pPr>
+            <a:r>
+              <a:rPr sz="9000" b="0" spc="-180" lang="ja-JP" altLang="en-US">
+                <a:solidFill>
+                  <a:srgbClr val="F26A1B"/>
+                </a:solidFill>
+                <a:latin typeface="Noto Sans JP Medium"/>
+                <a:ea typeface="Noto Sans JP Medium"/>
+                <a:cs typeface="Noto Sans JP Medium"/>
+              </a:rPr>
+              <a:t>万円</a:t>
+            </a:r>
+          </a:p>
+        </p:txBody>
+      </p:sp>
+      <p:sp>
+        <p:nvSpPr>
+          <p:cNvPr id="7" name="注記"/>
+          <p:cNvSpPr txBox="1"/>
+          <p:nvPr/>
+        </p:nvSpPr>
+        <p:spPr>
+          <a:xfrm>
+            <a:off x="812800" y="6172200"/>
+            <a:ext cx="4866680" cy="203200"/>
+          </a:xfrm>
+          <a:prstGeom prst="rect">
+            <a:avLst/>
+          </a:prstGeom>
+          <a:noFill/>
+        </p:spPr>
+        <p:txBody>
+          <a:bodyPr wrap="none" lIns="0" rIns="0" tIns="0" bIns="0" anchor="t"/>
+          <a:lstStyle/>
+          <a:p>
+            <a:pPr>
+              <a:lnSpc>
+                <a:spcPts val="1600"/>
+              </a:lnSpc>
+              <a:spcBef>
+                <a:spcPts val="0"/>
+              </a:spcBef>
+              <a:spcAft>
+                <a:spcPts val="0"/>
+              </a:spcAft>
+            </a:pPr>
+            <a:r>
+              <a:rPr sz="1100" b="0" spc="11" lang="ja-JP" altLang="en-US">
+                <a:solidFill>
+                  <a:srgbClr val="A3A3A3"/>
+                </a:solidFill>
+                <a:latin typeface="Noto Sans JP"/>
+                <a:ea typeface="Noto Sans JP"/>
+                <a:cs typeface="Noto Sans JP"/>
+              </a:rPr>
+              <a:t>※ 登壇者の実体験（1件）。一般的な効果を示す数値ではありません。</a:t>
+            </a:r>
+          </a:p>
+        </p:txBody>
+      </p:sp>
+    </p:spTree>
+  </p:cSld>
+  <p:clrMapOvr>
+    <a:masterClrMapping/>
+  </p:clrMapOvr>
+</p:sld>
+</file>
+
+<file path=ppt/slides/slide8.xml><?xml version="1.0" encoding="utf-8"?>
+<p:sld xmlns:a="http://schemas.openxmlformats.org/drawingml/2006/main" xmlns:p="http://schemas.openxmlformats.org/presentationml/2006/main" xmlns:r="http://schemas.openxmlformats.org/officeDocument/2006/relationships">
+  <p:cSld>
+    <p:bg>
+      <p:bgPr>
+        <a:solidFill>
+          <a:srgbClr val="0A0A0A"/>
+        </a:solidFill>
+        <a:effectLst/>
+      </p:bgPr>
+    </p:bg>
+    <p:spTree>
+      <p:nvGrpSpPr>
+        <p:cNvPr id="1" name=""/>
+        <p:cNvGrpSpPr/>
+        <p:nvPr/>
+      </p:nvGrpSpPr>
+      <p:grpSpPr/>
+      <p:sp>
+        <p:nvSpPr>
           <p:cNvPr id="2" name="見出し"/>
           <p:cNvSpPr txBox="1"/>
           <p:nvPr/>
@@ -6218,7 +6547,7 @@
 </p:sld>
 </file>
 
-<file path=ppt/slides/slide8.xml><?xml version="1.0" encoding="utf-8"?>
+<file path=ppt/slides/slide9.xml><?xml version="1.0" encoding="utf-8"?>
 <p:sld xmlns:a="http://schemas.openxmlformats.org/drawingml/2006/main" xmlns:p="http://schemas.openxmlformats.org/presentationml/2006/main" xmlns:r="http://schemas.openxmlformats.org/officeDocument/2006/relationships">
   <p:cSld>
     <p:bg>

--- a/docs/collateral/seminar-luggage/out/BondEx_Seminar_TypeOnly.pptx
+++ b/docs/collateral/seminar-luggage/out/BondEx_Seminar_TypeOnly.pptx
@@ -4523,7 +4523,7 @@
       <p:grpSpPr/>
       <p:pic>
         <p:nvPicPr>
-          <p:cNvPr id="2" name="BondEx ロゴ" descr="bondex-logo-white.png"/>
+          <p:cNvPr id="2" name="BondEx ロゴ" descr="bondex-logo-red.png"/>
           <p:cNvPicPr>
             <a:picLocks noChangeAspect="1"/>
           </p:cNvPicPr>
@@ -6636,7 +6636,7 @@
       </p:sp>
       <p:pic>
         <p:nvPicPr>
-          <p:cNvPr id="3" name="BondEx ロゴ" descr="bondex-logo-white.png"/>
+          <p:cNvPr id="3" name="BondEx ロゴ" descr="bondex-logo-red.png"/>
           <p:cNvPicPr>
             <a:picLocks noChangeAspect="1"/>
           </p:cNvPicPr>

--- a/docs/collateral/seminar-luggage/out/BondEx_Seminar_TypeOnly.pptx
+++ b/docs/collateral/seminar-luggage/out/BondEx_Seminar_TypeOnly.pptx
@@ -609,7 +609,7 @@
           <a:p/>
           <a:p>
             <a:r>
-              <a:t>皆さん、こんにちは。BondExの［氏名］です。今日は15分ほど、「荷物」のお話をさせてください。</a:t>
+              <a:t>皆さん、こんにちは。株式会社JOJO、BondExの谷口です。今日は15分ほど、「荷物」のお話をさせてください。</a:t>
             </a:r>
           </a:p>
           <a:p>
@@ -4687,7 +4687,97 @@
       </p:pic>
       <p:sp>
         <p:nvSpPr>
-          <p:cNvPr id="6" name="QRの説明"/>
+          <p:cNvPr id="6" name="登壇者"/>
+          <p:cNvSpPr txBox="1"/>
+          <p:nvPr/>
+        </p:nvSpPr>
+        <p:spPr>
+          <a:xfrm>
+            <a:off x="812800" y="5452586"/>
+            <a:ext cx="2880916" cy="234355"/>
+          </a:xfrm>
+          <a:prstGeom prst="rect">
+            <a:avLst/>
+          </a:prstGeom>
+          <a:noFill/>
+        </p:spPr>
+        <p:txBody>
+          <a:bodyPr wrap="none" lIns="0" rIns="0" tIns="0" bIns="0" anchor="t"/>
+          <a:lstStyle/>
+          <a:p>
+            <a:pPr>
+              <a:lnSpc>
+                <a:spcPts val="1846"/>
+              </a:lnSpc>
+              <a:spcBef>
+                <a:spcPts val="0"/>
+              </a:spcBef>
+              <a:spcAft>
+                <a:spcPts val="0"/>
+              </a:spcAft>
+            </a:pPr>
+            <a:r>
+              <a:rPr sz="1300" b="0" spc="26" lang="ja-JP" altLang="en-US">
+                <a:solidFill>
+                  <a:srgbClr val="A3A3A3"/>
+                </a:solidFill>
+                <a:latin typeface="Noto Sans JP"/>
+                <a:ea typeface="Noto Sans JP"/>
+                <a:cs typeface="Noto Sans JP"/>
+              </a:rPr>
+              <a:t>株式会社JOJO　代表取締役</a:t>
+            </a:r>
+          </a:p>
+        </p:txBody>
+      </p:sp>
+      <p:sp>
+        <p:nvSpPr>
+          <p:cNvPr id="7" name="登壇者"/>
+          <p:cNvSpPr txBox="1"/>
+          <p:nvPr/>
+        </p:nvSpPr>
+        <p:spPr>
+          <a:xfrm>
+            <a:off x="812800" y="5703768"/>
+            <a:ext cx="2880916" cy="396677"/>
+          </a:xfrm>
+          <a:prstGeom prst="rect">
+            <a:avLst/>
+          </a:prstGeom>
+          <a:noFill/>
+        </p:spPr>
+        <p:txBody>
+          <a:bodyPr wrap="none" lIns="0" rIns="0" tIns="0" bIns="0" anchor="t"/>
+          <a:lstStyle/>
+          <a:p>
+            <a:pPr>
+              <a:lnSpc>
+                <a:spcPts val="3124"/>
+              </a:lnSpc>
+              <a:spcBef>
+                <a:spcPts val="0"/>
+              </a:spcBef>
+              <a:spcAft>
+                <a:spcPts val="0"/>
+              </a:spcAft>
+            </a:pPr>
+            <a:r>
+              <a:rPr sz="2200" b="0" spc="132" lang="ja-JP" altLang="en-US">
+                <a:solidFill>
+                  <a:srgbClr val="FFFFFF"/>
+                </a:solidFill>
+                <a:latin typeface="Noto Sans JP Medium"/>
+                <a:ea typeface="Noto Sans JP Medium"/>
+                <a:cs typeface="Noto Sans JP Medium"/>
+              </a:rPr>
+              <a:t>谷口琢真</a:t>
+            </a:r>
+          </a:p>
+        </p:txBody>
+      </p:sp>
+      <p:sp>
+        <p:nvSpPr>
+          <p:cNvPr id="8" name="QRの説明"/>
           <p:cNvSpPr txBox="1"/>
           <p:nvPr/>
         </p:nvSpPr>
